--- a/public/fun/pack/pptx/talk/발표템플릿_28_업무보고_감나무집.pptx
+++ b/public/fun/pack/pptx/talk/발표템플릿_28_업무보고_감나무집.pptx
@@ -3286,6 +3286,14 @@
 <file path=ppt/slides/slide1.xml><?xml version="1.0" encoding="utf-8"?>
 <p:sld xmlns:a="http://schemas.openxmlformats.org/drawingml/2006/main" xmlns:p="http://schemas.openxmlformats.org/presentationml/2006/main" xmlns:r="http://schemas.openxmlformats.org/officeDocument/2006/relationships">
   <p:cSld>
+    <p:bg>
+      <p:bgPr>
+        <a:solidFill>
+          <a:srgbClr val="493727"/>
+        </a:solidFill>
+        <a:effectLst/>
+      </p:bgPr>
+    </p:bg>
     <p:spTree>
       <p:nvGrpSpPr>
         <p:cNvPr id="1" name=""/>
@@ -3293,30 +3301,102 @@
         <p:nvPr/>
       </p:nvGrpSpPr>
       <p:grpSpPr/>
-      <p:pic>
-        <p:nvPicPr>
-          <p:cNvPr id="3" name="표지 그림" descr="talk-28.jpg"/>
-          <p:cNvPicPr>
-            <a:picLocks noChangeAspect="1"/>
-          </p:cNvPicPr>
+      <p:sp>
+        <p:nvSpPr>
+          <p:cNvPr id="3" name="장식"/>
+          <p:cNvSpPr/>
           <p:nvPr/>
-        </p:nvPicPr>
-        <p:blipFill>
-          <a:blip r:embed="rId2"/>
-          <a:stretch>
-            <a:fillRect/>
-          </a:stretch>
-        </p:blipFill>
-        <p:spPr>
-          <a:xfrm>
-            <a:off x="0" y="0"/>
-            <a:ext cx="12191695" cy="6858000"/>
+        </p:nvSpPr>
+        <p:spPr>
+          <a:xfrm>
+            <a:off x="6339681" y="137159"/>
+            <a:ext cx="6583680" cy="6583680"/>
+          </a:xfrm>
+          <a:prstGeom prst="ellipse">
+            <a:avLst/>
+          </a:prstGeom>
+          <a:solidFill>
+            <a:srgbClr val="A67E5C"/>
+          </a:solidFill>
+          <a:ln>
+            <a:noFill/>
+          </a:ln>
+        </p:spPr>
+        <p:txBody>
+          <a:bodyPr rtlCol="0" anchor="ctr"/>
+          <a:lstStyle/>
+          <a:p>
+            <a:pPr algn="ctr"/>
+          </a:p>
+        </p:txBody>
+      </p:sp>
+      <p:sp>
+        <p:nvSpPr>
+          <p:cNvPr id="4" name="장식"/>
+          <p:cNvSpPr/>
+          <p:nvPr/>
+        </p:nvSpPr>
+        <p:spPr>
+          <a:xfrm>
+            <a:off x="7315017" y="1325880"/>
+            <a:ext cx="4206240" cy="4206240"/>
+          </a:xfrm>
+          <a:prstGeom prst="ellipse">
+            <a:avLst/>
+          </a:prstGeom>
+          <a:solidFill>
+            <a:srgbClr val="D8A579"/>
+          </a:solidFill>
+          <a:ln>
+            <a:noFill/>
+          </a:ln>
+        </p:spPr>
+        <p:txBody>
+          <a:bodyPr rtlCol="0" anchor="ctr"/>
+          <a:lstStyle/>
+          <a:p>
+            <a:pPr algn="ctr"/>
+          </a:p>
+        </p:txBody>
+      </p:sp>
+      <p:sp>
+        <p:nvSpPr>
+          <p:cNvPr id="5" name="라벨"/>
+          <p:cNvSpPr txBox="1"/>
+          <p:nvPr/>
+        </p:nvSpPr>
+        <p:spPr>
+          <a:xfrm>
+            <a:off x="822960" y="2148840"/>
+            <a:ext cx="5608179" cy="274320"/>
           </a:xfrm>
           <a:prstGeom prst="rect">
             <a:avLst/>
           </a:prstGeom>
-        </p:spPr>
-      </p:pic>
+          <a:noFill/>
+        </p:spPr>
+        <p:txBody>
+          <a:bodyPr wrap="square" lIns="54864" rIns="54864" tIns="27432" bIns="27432" anchor="t">
+            <a:noAutofit/>
+          </a:bodyPr>
+          <a:lstStyle/>
+          <a:p>
+            <a:pPr algn="l">
+              <a:lnSpc>
+                <a:spcPct val="115000"/>
+              </a:lnSpc>
+            </a:pPr>
+            <a:r>
+              <a:rPr sz="1000" b="1" i="0" spc="250">
+                <a:solidFill>
+                  <a:srgbClr val="FFFFFF"/>
+                </a:solidFill>
+              </a:rPr>
+              <a:t>PRESENTATION</a:t>
+            </a:r>
+          </a:p>
+        </p:txBody>
+      </p:sp>
       <p:sp>
         <p:nvSpPr>
           <p:cNvPr id="2" name="Title 1"/>
@@ -3329,8 +3409,8 @@
         </p:nvSpPr>
         <p:spPr>
           <a:xfrm>
-            <a:off x="853418" y="2057400"/>
-            <a:ext cx="6095847" cy="1554480"/>
+            <a:off x="822960" y="2606040"/>
+            <a:ext cx="5608179" cy="1188720"/>
           </a:xfrm>
         </p:spPr>
         <p:txBody>
@@ -3345,9 +3425,9 @@
               </a:lnSpc>
             </a:pPr>
             <a:r>
-              <a:rPr sz="3600" b="1" i="0">
+              <a:rPr sz="4000" b="1" i="0">
                 <a:solidFill>
-                  <a:srgbClr val="723F13"/>
+                  <a:srgbClr val="FFFFFF"/>
                 </a:solidFill>
               </a:rPr>
               <a:t>발표 제목을 입력하세요</a:t>
@@ -3357,14 +3437,14 @@
       </p:sp>
       <p:sp>
         <p:nvSpPr>
-          <p:cNvPr id="4" name="한 줄 문구"/>
+          <p:cNvPr id="6" name="한 줄 문구"/>
           <p:cNvSpPr txBox="1"/>
           <p:nvPr/>
         </p:nvSpPr>
         <p:spPr>
           <a:xfrm>
-            <a:off x="853418" y="3749039"/>
-            <a:ext cx="6095847" cy="822960"/>
+            <a:off x="822960" y="3886200"/>
+            <a:ext cx="5608179" cy="822960"/>
           </a:xfrm>
           <a:prstGeom prst="rect">
             <a:avLst/>
@@ -3383,26 +3463,26 @@
               </a:lnSpc>
             </a:pPr>
             <a:r>
-              <a:rPr sz="1700" b="0" i="1">
+              <a:rPr sz="1700" b="0" i="0">
                 <a:solidFill>
-                  <a:srgbClr val="723F13"/>
+                  <a:srgbClr val="FFFFFF"/>
                 </a:solidFill>
               </a:rPr>
-              <a:t>하반기 계획과 진행률입니다</a:t>
-            </a:r>
-          </a:p>
-        </p:txBody>
-      </p:sp>
-      <p:sp>
-        <p:nvSpPr>
-          <p:cNvPr id="5" name="안내 문구"/>
+              <a:t>앞으로의 계획과 진행률입니다</a:t>
+            </a:r>
+          </a:p>
+        </p:txBody>
+      </p:sp>
+      <p:sp>
+        <p:nvSpPr>
+          <p:cNvPr id="7" name="안내 문구"/>
           <p:cNvSpPr txBox="1"/>
           <p:nvPr/>
         </p:nvSpPr>
         <p:spPr>
           <a:xfrm>
-            <a:off x="853418" y="4617720"/>
-            <a:ext cx="6095847" cy="914400"/>
+            <a:off x="822960" y="4754880"/>
+            <a:ext cx="5608179" cy="914400"/>
           </a:xfrm>
           <a:prstGeom prst="rect">
             <a:avLst/>
@@ -3423,7 +3503,7 @@
             <a:r>
               <a:rPr sz="1400" b="0" i="0">
                 <a:solidFill>
-                  <a:srgbClr val="666666"/>
+                  <a:srgbClr val="FFFFFF"/>
                 </a:solidFill>
               </a:rPr>
               <a:t>업무 보고 · 발표자 이름</a:t>
@@ -3438,10 +3518,10 @@
             <a:r>
               <a:rPr sz="1400" b="0" i="0">
                 <a:solidFill>
-                  <a:srgbClr val="666666"/>
+                  <a:srgbClr val="FFFFFF"/>
                 </a:solidFill>
               </a:rPr>
-              <a:t>2027. 00. 00</a:t>
+              <a:t>날짜 입력</a:t>
             </a:r>
           </a:p>
         </p:txBody>
@@ -3460,7 +3540,7 @@
     <p:bg>
       <p:bgPr>
         <a:solidFill>
-          <a:srgbClr val="FCF4ED"/>
+          <a:srgbClr val="FBF3EC"/>
         </a:solidFill>
         <a:effectLst/>
       </p:bgPr>
@@ -3480,14 +3560,16 @@
         </p:nvSpPr>
         <p:spPr>
           <a:xfrm>
-            <a:off x="0" y="0"/>
-            <a:ext cx="411480" cy="6858000"/>
-          </a:xfrm>
-          <a:prstGeom prst="rect">
-            <a:avLst/>
+            <a:off x="640080" y="566928"/>
+            <a:ext cx="64008" cy="868680"/>
+          </a:xfrm>
+          <a:prstGeom prst="roundRect">
+            <a:avLst>
+              <a:gd name="adj" fmla="val 50000"/>
+            </a:avLst>
           </a:prstGeom>
           <a:solidFill>
-            <a:srgbClr val="CA7021"/>
+            <a:srgbClr val="D8A579"/>
           </a:solidFill>
           <a:ln>
             <a:noFill/>
@@ -3503,20 +3585,58 @@
       </p:sp>
       <p:sp>
         <p:nvSpPr>
-          <p:cNvPr id="4" name="장식"/>
-          <p:cNvSpPr/>
+          <p:cNvPr id="4" name="상단 라벨"/>
+          <p:cNvSpPr txBox="1"/>
           <p:nvPr/>
         </p:nvSpPr>
         <p:spPr>
           <a:xfrm>
-            <a:off x="411480" y="0"/>
-            <a:ext cx="64008" cy="6858000"/>
+            <a:off x="868680" y="274320"/>
+            <a:ext cx="5486400" cy="274320"/>
           </a:xfrm>
           <a:prstGeom prst="rect">
             <a:avLst/>
           </a:prstGeom>
+          <a:noFill/>
+        </p:spPr>
+        <p:txBody>
+          <a:bodyPr wrap="square" lIns="54864" rIns="54864" tIns="27432" bIns="27432" anchor="ctr">
+            <a:noAutofit/>
+          </a:bodyPr>
+          <a:lstStyle/>
+          <a:p>
+            <a:pPr algn="l">
+              <a:lnSpc>
+                <a:spcPct val="115000"/>
+              </a:lnSpc>
+            </a:pPr>
+            <a:r>
+              <a:rPr sz="900" b="1" i="0" spc="250">
+                <a:solidFill>
+                  <a:srgbClr val="8E8780"/>
+                </a:solidFill>
+              </a:rPr>
+              <a:t>PRESENTATION</a:t>
+            </a:r>
+          </a:p>
+        </p:txBody>
+      </p:sp>
+      <p:sp>
+        <p:nvSpPr>
+          <p:cNvPr id="5" name="포인트"/>
+          <p:cNvSpPr/>
+          <p:nvPr/>
+        </p:nvSpPr>
+        <p:spPr>
+          <a:xfrm>
+            <a:off x="11167567" y="667512"/>
+            <a:ext cx="310896" cy="310896"/>
+          </a:xfrm>
+          <a:prstGeom prst="donut">
+            <a:avLst/>
+          </a:prstGeom>
           <a:solidFill>
-            <a:srgbClr val="3B918E"/>
+            <a:srgbClr val="EBCAAD"/>
           </a:solidFill>
           <a:ln>
             <a:noFill/>
@@ -3542,7 +3662,7 @@
         </p:nvSpPr>
         <p:spPr>
           <a:xfrm>
-            <a:off x="914400" y="457200"/>
+            <a:off x="868680" y="566928"/>
             <a:ext cx="9448495" cy="868680"/>
           </a:xfrm>
         </p:spPr>
@@ -3560,7 +3680,7 @@
             <a:r>
               <a:rPr sz="3000" b="1" i="0">
                 <a:solidFill>
-                  <a:srgbClr val="723F13"/>
+                  <a:srgbClr val="26231F"/>
                 </a:solidFill>
               </a:rPr>
               <a:t>목차</a:t>
@@ -3570,27 +3690,25 @@
       </p:sp>
       <p:sp>
         <p:nvSpPr>
-          <p:cNvPr id="5" name="줄 1"/>
+          <p:cNvPr id="6" name="줄 1"/>
           <p:cNvSpPr/>
           <p:nvPr/>
         </p:nvSpPr>
         <p:spPr>
           <a:xfrm>
-            <a:off x="914400" y="1600200"/>
-            <a:ext cx="10637215" cy="914400"/>
+            <a:off x="640080" y="1783080"/>
+            <a:ext cx="10911535" cy="914400"/>
           </a:xfrm>
           <a:prstGeom prst="roundRect">
             <a:avLst>
-              <a:gd name="adj" fmla="val 8000"/>
+              <a:gd name="adj" fmla="val 7000"/>
             </a:avLst>
           </a:prstGeom>
           <a:solidFill>
-            <a:srgbClr val="FCF4ED"/>
+            <a:srgbClr val="FBF3EC"/>
           </a:solidFill>
-          <a:ln w="12700">
-            <a:solidFill>
-              <a:srgbClr val="F8DFC9"/>
-            </a:solidFill>
+          <a:ln>
+            <a:noFill/>
           </a:ln>
         </p:spPr>
         <p:txBody>
@@ -3603,23 +3721,23 @@
       </p:sp>
       <p:sp>
         <p:nvSpPr>
-          <p:cNvPr id="6" name="번호 1"/>
+          <p:cNvPr id="7" name="번호 1"/>
           <p:cNvSpPr/>
           <p:nvPr/>
         </p:nvSpPr>
         <p:spPr>
           <a:xfrm>
-            <a:off x="1097280" y="1828800"/>
+            <a:off x="822959" y="2011680"/>
             <a:ext cx="457200" cy="457200"/>
           </a:xfrm>
           <a:prstGeom prst="ellipse">
             <a:avLst/>
           </a:prstGeom>
-          <a:solidFill>
-            <a:srgbClr val="CA7021"/>
-          </a:solidFill>
-          <a:ln>
-            <a:noFill/>
+          <a:noFill/>
+          <a:ln w="19050">
+            <a:solidFill>
+              <a:srgbClr val="D8A579"/>
+            </a:solidFill>
           </a:ln>
         </p:spPr>
         <p:txBody>
@@ -3636,7 +3754,7 @@
             <a:r>
               <a:rPr sz="1600" b="1" i="0">
                 <a:solidFill>
-                  <a:srgbClr val="FFFFFF"/>
+                  <a:srgbClr val="493727"/>
                 </a:solidFill>
               </a:rPr>
               <a:t>1</a:t>
@@ -3646,13 +3764,13 @@
       </p:sp>
       <p:sp>
         <p:nvSpPr>
-          <p:cNvPr id="7" name="TextBox 6"/>
+          <p:cNvPr id="8" name="TextBox 7"/>
           <p:cNvSpPr txBox="1"/>
           <p:nvPr/>
         </p:nvSpPr>
         <p:spPr>
           <a:xfrm>
-            <a:off x="1783080" y="1645920"/>
+            <a:off x="1508760" y="1828800"/>
             <a:ext cx="2743200" cy="822960"/>
           </a:xfrm>
           <a:prstGeom prst="rect">
@@ -3674,7 +3792,7 @@
             <a:r>
               <a:rPr sz="1800" b="1" i="0">
                 <a:solidFill>
-                  <a:srgbClr val="723F13"/>
+                  <a:srgbClr val="493727"/>
                 </a:solidFill>
               </a:rPr>
               <a:t>추진 경과</a:t>
@@ -3684,14 +3802,14 @@
       </p:sp>
       <p:sp>
         <p:nvSpPr>
-          <p:cNvPr id="8" name="TextBox 7"/>
+          <p:cNvPr id="9" name="TextBox 8"/>
           <p:cNvSpPr txBox="1"/>
           <p:nvPr/>
         </p:nvSpPr>
         <p:spPr>
           <a:xfrm>
-            <a:off x="4572000" y="1645920"/>
-            <a:ext cx="6796735" cy="822960"/>
+            <a:off x="4297680" y="1828800"/>
+            <a:ext cx="7071055" cy="822960"/>
           </a:xfrm>
           <a:prstGeom prst="rect">
             <a:avLst/>
@@ -3712,7 +3830,7 @@
             <a:r>
               <a:rPr sz="1500" b="0" i="0">
                 <a:solidFill>
-                  <a:srgbClr val="2B2B2B"/>
+                  <a:srgbClr val="26231F"/>
                 </a:solidFill>
               </a:rPr>
               <a:t>한 줄로 내용을 적어 주세요</a:t>
@@ -3722,27 +3840,25 @@
       </p:sp>
       <p:sp>
         <p:nvSpPr>
-          <p:cNvPr id="9" name="줄 2"/>
+          <p:cNvPr id="10" name="줄 2"/>
           <p:cNvSpPr/>
           <p:nvPr/>
         </p:nvSpPr>
         <p:spPr>
           <a:xfrm>
-            <a:off x="914400" y="2651760"/>
-            <a:ext cx="10637215" cy="914400"/>
+            <a:off x="640080" y="2834639"/>
+            <a:ext cx="10911535" cy="914400"/>
           </a:xfrm>
           <a:prstGeom prst="roundRect">
             <a:avLst>
-              <a:gd name="adj" fmla="val 8000"/>
+              <a:gd name="adj" fmla="val 7000"/>
             </a:avLst>
           </a:prstGeom>
           <a:solidFill>
-            <a:srgbClr val="FCF4ED"/>
+            <a:srgbClr val="FBF3EC"/>
           </a:solidFill>
-          <a:ln w="12700">
-            <a:solidFill>
-              <a:srgbClr val="F8DFC9"/>
-            </a:solidFill>
+          <a:ln>
+            <a:noFill/>
           </a:ln>
         </p:spPr>
         <p:txBody>
@@ -3755,23 +3871,23 @@
       </p:sp>
       <p:sp>
         <p:nvSpPr>
-          <p:cNvPr id="10" name="번호 2"/>
+          <p:cNvPr id="11" name="번호 2"/>
           <p:cNvSpPr/>
           <p:nvPr/>
         </p:nvSpPr>
         <p:spPr>
           <a:xfrm>
-            <a:off x="1097280" y="2880360"/>
+            <a:off x="822959" y="3063239"/>
             <a:ext cx="457200" cy="457200"/>
           </a:xfrm>
           <a:prstGeom prst="ellipse">
             <a:avLst/>
           </a:prstGeom>
-          <a:solidFill>
-            <a:srgbClr val="CA7021"/>
-          </a:solidFill>
-          <a:ln>
-            <a:noFill/>
+          <a:noFill/>
+          <a:ln w="19050">
+            <a:solidFill>
+              <a:srgbClr val="D8A579"/>
+            </a:solidFill>
           </a:ln>
         </p:spPr>
         <p:txBody>
@@ -3788,7 +3904,7 @@
             <a:r>
               <a:rPr sz="1600" b="1" i="0">
                 <a:solidFill>
-                  <a:srgbClr val="FFFFFF"/>
+                  <a:srgbClr val="493727"/>
                 </a:solidFill>
               </a:rPr>
               <a:t>2</a:t>
@@ -3798,13 +3914,13 @@
       </p:sp>
       <p:sp>
         <p:nvSpPr>
-          <p:cNvPr id="11" name="TextBox 10"/>
+          <p:cNvPr id="12" name="TextBox 11"/>
           <p:cNvSpPr txBox="1"/>
           <p:nvPr/>
         </p:nvSpPr>
         <p:spPr>
           <a:xfrm>
-            <a:off x="1783080" y="2697479"/>
+            <a:off x="1508760" y="2880359"/>
             <a:ext cx="2743200" cy="822960"/>
           </a:xfrm>
           <a:prstGeom prst="rect">
@@ -3826,7 +3942,7 @@
             <a:r>
               <a:rPr sz="1800" b="1" i="0">
                 <a:solidFill>
-                  <a:srgbClr val="723F13"/>
+                  <a:srgbClr val="493727"/>
                 </a:solidFill>
               </a:rPr>
               <a:t>주요 성과</a:t>
@@ -3836,14 +3952,14 @@
       </p:sp>
       <p:sp>
         <p:nvSpPr>
-          <p:cNvPr id="12" name="TextBox 11"/>
+          <p:cNvPr id="13" name="TextBox 12"/>
           <p:cNvSpPr txBox="1"/>
           <p:nvPr/>
         </p:nvSpPr>
         <p:spPr>
           <a:xfrm>
-            <a:off x="4572000" y="2697479"/>
-            <a:ext cx="6796735" cy="822960"/>
+            <a:off x="4297680" y="2880359"/>
+            <a:ext cx="7071055" cy="822960"/>
           </a:xfrm>
           <a:prstGeom prst="rect">
             <a:avLst/>
@@ -3864,7 +3980,7 @@
             <a:r>
               <a:rPr sz="1500" b="0" i="0">
                 <a:solidFill>
-                  <a:srgbClr val="2B2B2B"/>
+                  <a:srgbClr val="26231F"/>
                 </a:solidFill>
               </a:rPr>
               <a:t>한 줄로 내용을 적어 주세요</a:t>
@@ -3874,27 +3990,25 @@
       </p:sp>
       <p:sp>
         <p:nvSpPr>
-          <p:cNvPr id="13" name="줄 3"/>
+          <p:cNvPr id="14" name="줄 3"/>
           <p:cNvSpPr/>
           <p:nvPr/>
         </p:nvSpPr>
         <p:spPr>
           <a:xfrm>
-            <a:off x="914400" y="3703320"/>
-            <a:ext cx="10637215" cy="914400"/>
+            <a:off x="640080" y="3886200"/>
+            <a:ext cx="10911535" cy="914400"/>
           </a:xfrm>
           <a:prstGeom prst="roundRect">
             <a:avLst>
-              <a:gd name="adj" fmla="val 8000"/>
+              <a:gd name="adj" fmla="val 7000"/>
             </a:avLst>
           </a:prstGeom>
           <a:solidFill>
-            <a:srgbClr val="FCF4ED"/>
+            <a:srgbClr val="FBF3EC"/>
           </a:solidFill>
-          <a:ln w="12700">
-            <a:solidFill>
-              <a:srgbClr val="F8DFC9"/>
-            </a:solidFill>
+          <a:ln>
+            <a:noFill/>
           </a:ln>
         </p:spPr>
         <p:txBody>
@@ -3907,23 +4021,23 @@
       </p:sp>
       <p:sp>
         <p:nvSpPr>
-          <p:cNvPr id="14" name="번호 3"/>
+          <p:cNvPr id="15" name="번호 3"/>
           <p:cNvSpPr/>
           <p:nvPr/>
         </p:nvSpPr>
         <p:spPr>
           <a:xfrm>
-            <a:off x="1097280" y="3931920"/>
+            <a:off x="822959" y="4114800"/>
             <a:ext cx="457200" cy="457200"/>
           </a:xfrm>
           <a:prstGeom prst="ellipse">
             <a:avLst/>
           </a:prstGeom>
-          <a:solidFill>
-            <a:srgbClr val="CA7021"/>
-          </a:solidFill>
-          <a:ln>
-            <a:noFill/>
+          <a:noFill/>
+          <a:ln w="19050">
+            <a:solidFill>
+              <a:srgbClr val="D8A579"/>
+            </a:solidFill>
           </a:ln>
         </p:spPr>
         <p:txBody>
@@ -3940,7 +4054,7 @@
             <a:r>
               <a:rPr sz="1600" b="1" i="0">
                 <a:solidFill>
-                  <a:srgbClr val="FFFFFF"/>
+                  <a:srgbClr val="493727"/>
                 </a:solidFill>
               </a:rPr>
               <a:t>3</a:t>
@@ -3950,13 +4064,13 @@
       </p:sp>
       <p:sp>
         <p:nvSpPr>
-          <p:cNvPr id="15" name="TextBox 14"/>
+          <p:cNvPr id="16" name="TextBox 15"/>
           <p:cNvSpPr txBox="1"/>
           <p:nvPr/>
         </p:nvSpPr>
         <p:spPr>
           <a:xfrm>
-            <a:off x="1783080" y="3749039"/>
+            <a:off x="1508760" y="3931920"/>
             <a:ext cx="2743200" cy="822960"/>
           </a:xfrm>
           <a:prstGeom prst="rect">
@@ -3978,7 +4092,7 @@
             <a:r>
               <a:rPr sz="1800" b="1" i="0">
                 <a:solidFill>
-                  <a:srgbClr val="723F13"/>
+                  <a:srgbClr val="493727"/>
                 </a:solidFill>
               </a:rPr>
               <a:t>이슈와 대응</a:t>
@@ -3988,14 +4102,14 @@
       </p:sp>
       <p:sp>
         <p:nvSpPr>
-          <p:cNvPr id="16" name="TextBox 15"/>
+          <p:cNvPr id="17" name="TextBox 16"/>
           <p:cNvSpPr txBox="1"/>
           <p:nvPr/>
         </p:nvSpPr>
         <p:spPr>
           <a:xfrm>
-            <a:off x="4572000" y="3749039"/>
-            <a:ext cx="6796735" cy="822960"/>
+            <a:off x="4297680" y="3931920"/>
+            <a:ext cx="7071055" cy="822960"/>
           </a:xfrm>
           <a:prstGeom prst="rect">
             <a:avLst/>
@@ -4016,7 +4130,7 @@
             <a:r>
               <a:rPr sz="1500" b="0" i="0">
                 <a:solidFill>
-                  <a:srgbClr val="2B2B2B"/>
+                  <a:srgbClr val="26231F"/>
                 </a:solidFill>
               </a:rPr>
               <a:t>한 줄로 내용을 적어 주세요</a:t>
@@ -4026,27 +4140,25 @@
       </p:sp>
       <p:sp>
         <p:nvSpPr>
-          <p:cNvPr id="17" name="줄 4"/>
+          <p:cNvPr id="18" name="줄 4"/>
           <p:cNvSpPr/>
           <p:nvPr/>
         </p:nvSpPr>
         <p:spPr>
           <a:xfrm>
-            <a:off x="914400" y="4754879"/>
-            <a:ext cx="10637215" cy="914400"/>
+            <a:off x="640080" y="4937759"/>
+            <a:ext cx="10911535" cy="914400"/>
           </a:xfrm>
           <a:prstGeom prst="roundRect">
             <a:avLst>
-              <a:gd name="adj" fmla="val 8000"/>
+              <a:gd name="adj" fmla="val 7000"/>
             </a:avLst>
           </a:prstGeom>
           <a:solidFill>
-            <a:srgbClr val="FCF4ED"/>
+            <a:srgbClr val="FBF3EC"/>
           </a:solidFill>
-          <a:ln w="12700">
-            <a:solidFill>
-              <a:srgbClr val="F8DFC9"/>
-            </a:solidFill>
+          <a:ln>
+            <a:noFill/>
           </a:ln>
         </p:spPr>
         <p:txBody>
@@ -4059,23 +4171,23 @@
       </p:sp>
       <p:sp>
         <p:nvSpPr>
-          <p:cNvPr id="18" name="번호 4"/>
+          <p:cNvPr id="19" name="번호 4"/>
           <p:cNvSpPr/>
           <p:nvPr/>
         </p:nvSpPr>
         <p:spPr>
           <a:xfrm>
-            <a:off x="1097280" y="4983479"/>
+            <a:off x="822959" y="5166359"/>
             <a:ext cx="457200" cy="457200"/>
           </a:xfrm>
           <a:prstGeom prst="ellipse">
             <a:avLst/>
           </a:prstGeom>
-          <a:solidFill>
-            <a:srgbClr val="CA7021"/>
-          </a:solidFill>
-          <a:ln>
-            <a:noFill/>
+          <a:noFill/>
+          <a:ln w="19050">
+            <a:solidFill>
+              <a:srgbClr val="D8A579"/>
+            </a:solidFill>
           </a:ln>
         </p:spPr>
         <p:txBody>
@@ -4092,7 +4204,7 @@
             <a:r>
               <a:rPr sz="1600" b="1" i="0">
                 <a:solidFill>
-                  <a:srgbClr val="FFFFFF"/>
+                  <a:srgbClr val="493727"/>
                 </a:solidFill>
               </a:rPr>
               <a:t>4</a:t>
@@ -4102,13 +4214,13 @@
       </p:sp>
       <p:sp>
         <p:nvSpPr>
-          <p:cNvPr id="19" name="TextBox 18"/>
+          <p:cNvPr id="20" name="TextBox 19"/>
           <p:cNvSpPr txBox="1"/>
           <p:nvPr/>
         </p:nvSpPr>
         <p:spPr>
           <a:xfrm>
-            <a:off x="1783080" y="4800599"/>
+            <a:off x="1508760" y="4983479"/>
             <a:ext cx="2743200" cy="822960"/>
           </a:xfrm>
           <a:prstGeom prst="rect">
@@ -4130,7 +4242,7 @@
             <a:r>
               <a:rPr sz="1800" b="1" i="0">
                 <a:solidFill>
-                  <a:srgbClr val="723F13"/>
+                  <a:srgbClr val="493727"/>
                 </a:solidFill>
               </a:rPr>
               <a:t>향후 계획</a:t>
@@ -4140,14 +4252,14 @@
       </p:sp>
       <p:sp>
         <p:nvSpPr>
-          <p:cNvPr id="20" name="TextBox 19"/>
+          <p:cNvPr id="21" name="TextBox 20"/>
           <p:cNvSpPr txBox="1"/>
           <p:nvPr/>
         </p:nvSpPr>
         <p:spPr>
           <a:xfrm>
-            <a:off x="4572000" y="4800599"/>
-            <a:ext cx="6796735" cy="822960"/>
+            <a:off x="4297680" y="4983479"/>
+            <a:ext cx="7071055" cy="822960"/>
           </a:xfrm>
           <a:prstGeom prst="rect">
             <a:avLst/>
@@ -4168,7 +4280,7 @@
             <a:r>
               <a:rPr sz="1500" b="0" i="0">
                 <a:solidFill>
-                  <a:srgbClr val="2B2B2B"/>
+                  <a:srgbClr val="26231F"/>
                 </a:solidFill>
               </a:rPr>
               <a:t>한 줄로 내용을 적어 주세요</a:t>
@@ -4190,7 +4302,7 @@
     <p:bg>
       <p:bgPr>
         <a:solidFill>
-          <a:srgbClr val="FCF4ED"/>
+          <a:srgbClr val="FBF3EC"/>
         </a:solidFill>
         <a:effectLst/>
       </p:bgPr>
@@ -4210,14 +4322,16 @@
         </p:nvSpPr>
         <p:spPr>
           <a:xfrm>
-            <a:off x="0" y="0"/>
-            <a:ext cx="411480" cy="6858000"/>
-          </a:xfrm>
-          <a:prstGeom prst="rect">
-            <a:avLst/>
+            <a:off x="640080" y="566928"/>
+            <a:ext cx="64008" cy="868680"/>
+          </a:xfrm>
+          <a:prstGeom prst="roundRect">
+            <a:avLst>
+              <a:gd name="adj" fmla="val 50000"/>
+            </a:avLst>
           </a:prstGeom>
           <a:solidFill>
-            <a:srgbClr val="CA7021"/>
+            <a:srgbClr val="D8A579"/>
           </a:solidFill>
           <a:ln>
             <a:noFill/>
@@ -4233,20 +4347,58 @@
       </p:sp>
       <p:sp>
         <p:nvSpPr>
-          <p:cNvPr id="4" name="장식"/>
-          <p:cNvSpPr/>
+          <p:cNvPr id="4" name="상단 라벨"/>
+          <p:cNvSpPr txBox="1"/>
           <p:nvPr/>
         </p:nvSpPr>
         <p:spPr>
           <a:xfrm>
-            <a:off x="411480" y="0"/>
-            <a:ext cx="64008" cy="6858000"/>
+            <a:off x="868680" y="274320"/>
+            <a:ext cx="5486400" cy="274320"/>
           </a:xfrm>
           <a:prstGeom prst="rect">
             <a:avLst/>
           </a:prstGeom>
+          <a:noFill/>
+        </p:spPr>
+        <p:txBody>
+          <a:bodyPr wrap="square" lIns="54864" rIns="54864" tIns="27432" bIns="27432" anchor="ctr">
+            <a:noAutofit/>
+          </a:bodyPr>
+          <a:lstStyle/>
+          <a:p>
+            <a:pPr algn="l">
+              <a:lnSpc>
+                <a:spcPct val="115000"/>
+              </a:lnSpc>
+            </a:pPr>
+            <a:r>
+              <a:rPr sz="900" b="1" i="0" spc="250">
+                <a:solidFill>
+                  <a:srgbClr val="8E8780"/>
+                </a:solidFill>
+              </a:rPr>
+              <a:t>PRESENTATION</a:t>
+            </a:r>
+          </a:p>
+        </p:txBody>
+      </p:sp>
+      <p:sp>
+        <p:nvSpPr>
+          <p:cNvPr id="5" name="포인트"/>
+          <p:cNvSpPr/>
+          <p:nvPr/>
+        </p:nvSpPr>
+        <p:spPr>
+          <a:xfrm>
+            <a:off x="11167567" y="667512"/>
+            <a:ext cx="310896" cy="310896"/>
+          </a:xfrm>
+          <a:prstGeom prst="donut">
+            <a:avLst/>
+          </a:prstGeom>
           <a:solidFill>
-            <a:srgbClr val="3B918E"/>
+            <a:srgbClr val="EBCAAD"/>
           </a:solidFill>
           <a:ln>
             <a:noFill/>
@@ -4272,7 +4424,7 @@
         </p:nvSpPr>
         <p:spPr>
           <a:xfrm>
-            <a:off x="914400" y="457200"/>
+            <a:off x="868680" y="566928"/>
             <a:ext cx="9448495" cy="868680"/>
           </a:xfrm>
         </p:spPr>
@@ -4290,7 +4442,7 @@
             <a:r>
               <a:rPr sz="3000" b="1" i="0">
                 <a:solidFill>
-                  <a:srgbClr val="723F13"/>
+                  <a:srgbClr val="26231F"/>
                 </a:solidFill>
               </a:rPr>
               <a:t>핵심 메시지</a:t>
@@ -4300,14 +4452,14 @@
       </p:sp>
       <p:sp>
         <p:nvSpPr>
-          <p:cNvPr id="5" name="핵심 문장"/>
+          <p:cNvPr id="6" name="핵심 문장"/>
           <p:cNvSpPr txBox="1"/>
           <p:nvPr/>
         </p:nvSpPr>
         <p:spPr>
           <a:xfrm>
-            <a:off x="914400" y="1600200"/>
-            <a:ext cx="10637215" cy="1188720"/>
+            <a:off x="640080" y="1783080"/>
+            <a:ext cx="10911535" cy="1188720"/>
           </a:xfrm>
           <a:prstGeom prst="rect">
             <a:avLst/>
@@ -4328,7 +4480,7 @@
             <a:r>
               <a:rPr sz="2600" b="1" i="0">
                 <a:solidFill>
-                  <a:srgbClr val="723F13"/>
+                  <a:srgbClr val="493727"/>
                 </a:solidFill>
               </a:rPr>
               <a:t>한 문장으로 말하면 — 여기에 핵심 메시지를 입력하세요</a:t>
@@ -4338,27 +4490,25 @@
       </p:sp>
       <p:sp>
         <p:nvSpPr>
-          <p:cNvPr id="6" name="카드 1"/>
+          <p:cNvPr id="7" name="카드 1"/>
           <p:cNvSpPr/>
           <p:nvPr/>
         </p:nvSpPr>
         <p:spPr>
           <a:xfrm>
-            <a:off x="914400" y="3063240"/>
-            <a:ext cx="3393338" cy="3017520"/>
+            <a:off x="640080" y="3246120"/>
+            <a:ext cx="3484778" cy="3017520"/>
           </a:xfrm>
           <a:prstGeom prst="roundRect">
             <a:avLst>
-              <a:gd name="adj" fmla="val 8000"/>
+              <a:gd name="adj" fmla="val 7000"/>
             </a:avLst>
           </a:prstGeom>
           <a:solidFill>
-            <a:srgbClr val="FCF4ED"/>
+            <a:srgbClr val="FBF3EC"/>
           </a:solidFill>
-          <a:ln w="15875">
-            <a:solidFill>
-              <a:srgbClr val="F8DFC9"/>
-            </a:solidFill>
+          <a:ln>
+            <a:noFill/>
           </a:ln>
         </p:spPr>
         <p:txBody>
@@ -4371,23 +4521,23 @@
       </p:sp>
       <p:sp>
         <p:nvSpPr>
-          <p:cNvPr id="7" name="번호 1"/>
+          <p:cNvPr id="8" name="번호 1"/>
           <p:cNvSpPr/>
           <p:nvPr/>
         </p:nvSpPr>
         <p:spPr>
           <a:xfrm>
-            <a:off x="1097280" y="3246120"/>
+            <a:off x="822959" y="3429000"/>
             <a:ext cx="457200" cy="457200"/>
           </a:xfrm>
           <a:prstGeom prst="ellipse">
             <a:avLst/>
           </a:prstGeom>
-          <a:solidFill>
-            <a:srgbClr val="CA7021"/>
-          </a:solidFill>
-          <a:ln>
-            <a:noFill/>
+          <a:noFill/>
+          <a:ln w="19050">
+            <a:solidFill>
+              <a:srgbClr val="D8A579"/>
+            </a:solidFill>
           </a:ln>
         </p:spPr>
         <p:txBody>
@@ -4404,7 +4554,7 @@
             <a:r>
               <a:rPr sz="1600" b="1" i="0">
                 <a:solidFill>
-                  <a:srgbClr val="FFFFFF"/>
+                  <a:srgbClr val="493727"/>
                 </a:solidFill>
               </a:rPr>
               <a:t>1</a:t>
@@ -4414,14 +4564,14 @@
       </p:sp>
       <p:sp>
         <p:nvSpPr>
-          <p:cNvPr id="8" name="TextBox 7"/>
+          <p:cNvPr id="9" name="TextBox 8"/>
           <p:cNvSpPr txBox="1"/>
           <p:nvPr/>
         </p:nvSpPr>
         <p:spPr>
           <a:xfrm>
-            <a:off x="1051560" y="3840480"/>
-            <a:ext cx="3119018" cy="640080"/>
+            <a:off x="777240" y="4023360"/>
+            <a:ext cx="3210458" cy="640080"/>
           </a:xfrm>
           <a:prstGeom prst="rect">
             <a:avLst/>
@@ -4442,7 +4592,7 @@
             <a:r>
               <a:rPr sz="1800" b="1" i="0">
                 <a:solidFill>
-                  <a:srgbClr val="723F13"/>
+                  <a:srgbClr val="493727"/>
                 </a:solidFill>
               </a:rPr>
               <a:t>진행</a:t>
@@ -4452,14 +4602,14 @@
       </p:sp>
       <p:sp>
         <p:nvSpPr>
-          <p:cNvPr id="9" name="TextBox 8"/>
+          <p:cNvPr id="10" name="TextBox 9"/>
           <p:cNvSpPr txBox="1"/>
           <p:nvPr/>
         </p:nvSpPr>
         <p:spPr>
           <a:xfrm>
-            <a:off x="1051560" y="4526280"/>
-            <a:ext cx="3119018" cy="1417319"/>
+            <a:off x="777240" y="4709160"/>
+            <a:ext cx="3210458" cy="1417319"/>
           </a:xfrm>
           <a:prstGeom prst="rect">
             <a:avLst/>
@@ -4480,7 +4630,7 @@
             <a:r>
               <a:rPr sz="1600" b="0" i="0">
                 <a:solidFill>
-                  <a:srgbClr val="2B2B2B"/>
+                  <a:srgbClr val="26231F"/>
                 </a:solidFill>
               </a:rPr>
               <a:t>내용을 입력하세요</a:t>
@@ -4495,7 +4645,7 @@
             <a:r>
               <a:rPr sz="1600" b="0" i="0">
                 <a:solidFill>
-                  <a:srgbClr val="2B2B2B"/>
+                  <a:srgbClr val="26231F"/>
                 </a:solidFill>
               </a:rPr>
               <a:t>내용을 입력하세요</a:t>
@@ -4505,27 +4655,25 @@
       </p:sp>
       <p:sp>
         <p:nvSpPr>
-          <p:cNvPr id="10" name="카드 2"/>
+          <p:cNvPr id="11" name="카드 2"/>
           <p:cNvSpPr/>
           <p:nvPr/>
         </p:nvSpPr>
         <p:spPr>
           <a:xfrm>
-            <a:off x="4536338" y="3063240"/>
-            <a:ext cx="3393338" cy="3017520"/>
+            <a:off x="4353458" y="3246120"/>
+            <a:ext cx="3484778" cy="3017520"/>
           </a:xfrm>
           <a:prstGeom prst="roundRect">
             <a:avLst>
-              <a:gd name="adj" fmla="val 8000"/>
+              <a:gd name="adj" fmla="val 7000"/>
             </a:avLst>
           </a:prstGeom>
           <a:solidFill>
-            <a:srgbClr val="FCF4ED"/>
+            <a:srgbClr val="FBF3EC"/>
           </a:solidFill>
-          <a:ln w="15875">
-            <a:solidFill>
-              <a:srgbClr val="F8DFC9"/>
-            </a:solidFill>
+          <a:ln>
+            <a:noFill/>
           </a:ln>
         </p:spPr>
         <p:txBody>
@@ -4538,23 +4686,23 @@
       </p:sp>
       <p:sp>
         <p:nvSpPr>
-          <p:cNvPr id="11" name="번호 2"/>
+          <p:cNvPr id="12" name="번호 2"/>
           <p:cNvSpPr/>
           <p:nvPr/>
         </p:nvSpPr>
         <p:spPr>
           <a:xfrm>
-            <a:off x="4719218" y="3246120"/>
+            <a:off x="4536338" y="3429000"/>
             <a:ext cx="457200" cy="457200"/>
           </a:xfrm>
           <a:prstGeom prst="ellipse">
             <a:avLst/>
           </a:prstGeom>
-          <a:solidFill>
-            <a:srgbClr val="CA7021"/>
-          </a:solidFill>
-          <a:ln>
-            <a:noFill/>
+          <a:noFill/>
+          <a:ln w="19050">
+            <a:solidFill>
+              <a:srgbClr val="D8A579"/>
+            </a:solidFill>
           </a:ln>
         </p:spPr>
         <p:txBody>
@@ -4571,7 +4719,7 @@
             <a:r>
               <a:rPr sz="1600" b="1" i="0">
                 <a:solidFill>
-                  <a:srgbClr val="FFFFFF"/>
+                  <a:srgbClr val="493727"/>
                 </a:solidFill>
               </a:rPr>
               <a:t>2</a:t>
@@ -4581,14 +4729,14 @@
       </p:sp>
       <p:sp>
         <p:nvSpPr>
-          <p:cNvPr id="12" name="TextBox 11"/>
+          <p:cNvPr id="13" name="TextBox 12"/>
           <p:cNvSpPr txBox="1"/>
           <p:nvPr/>
         </p:nvSpPr>
         <p:spPr>
           <a:xfrm>
-            <a:off x="4673498" y="3840480"/>
-            <a:ext cx="3119018" cy="640080"/>
+            <a:off x="4490618" y="4023360"/>
+            <a:ext cx="3210458" cy="640080"/>
           </a:xfrm>
           <a:prstGeom prst="rect">
             <a:avLst/>
@@ -4609,7 +4757,7 @@
             <a:r>
               <a:rPr sz="1800" b="1" i="0">
                 <a:solidFill>
-                  <a:srgbClr val="723F13"/>
+                  <a:srgbClr val="493727"/>
                 </a:solidFill>
               </a:rPr>
               <a:t>성과</a:t>
@@ -4619,14 +4767,14 @@
       </p:sp>
       <p:sp>
         <p:nvSpPr>
-          <p:cNvPr id="13" name="TextBox 12"/>
+          <p:cNvPr id="14" name="TextBox 13"/>
           <p:cNvSpPr txBox="1"/>
           <p:nvPr/>
         </p:nvSpPr>
         <p:spPr>
           <a:xfrm>
-            <a:off x="4673498" y="4526280"/>
-            <a:ext cx="3119018" cy="1417319"/>
+            <a:off x="4490618" y="4709160"/>
+            <a:ext cx="3210458" cy="1417319"/>
           </a:xfrm>
           <a:prstGeom prst="rect">
             <a:avLst/>
@@ -4647,7 +4795,7 @@
             <a:r>
               <a:rPr sz="1600" b="0" i="0">
                 <a:solidFill>
-                  <a:srgbClr val="2B2B2B"/>
+                  <a:srgbClr val="26231F"/>
                 </a:solidFill>
               </a:rPr>
               <a:t>내용을 입력하세요</a:t>
@@ -4662,7 +4810,7 @@
             <a:r>
               <a:rPr sz="1600" b="0" i="0">
                 <a:solidFill>
-                  <a:srgbClr val="2B2B2B"/>
+                  <a:srgbClr val="26231F"/>
                 </a:solidFill>
               </a:rPr>
               <a:t>내용을 입력하세요</a:t>
@@ -4672,27 +4820,25 @@
       </p:sp>
       <p:sp>
         <p:nvSpPr>
-          <p:cNvPr id="14" name="카드 3"/>
+          <p:cNvPr id="15" name="카드 3"/>
           <p:cNvSpPr/>
           <p:nvPr/>
         </p:nvSpPr>
         <p:spPr>
           <a:xfrm>
-            <a:off x="8158276" y="3063240"/>
-            <a:ext cx="3393338" cy="3017520"/>
+            <a:off x="8066836" y="3246120"/>
+            <a:ext cx="3484778" cy="3017520"/>
           </a:xfrm>
           <a:prstGeom prst="roundRect">
             <a:avLst>
-              <a:gd name="adj" fmla="val 8000"/>
+              <a:gd name="adj" fmla="val 7000"/>
             </a:avLst>
           </a:prstGeom>
           <a:solidFill>
-            <a:srgbClr val="FCF4ED"/>
+            <a:srgbClr val="FBF3EC"/>
           </a:solidFill>
-          <a:ln w="15875">
-            <a:solidFill>
-              <a:srgbClr val="F8DFC9"/>
-            </a:solidFill>
+          <a:ln>
+            <a:noFill/>
           </a:ln>
         </p:spPr>
         <p:txBody>
@@ -4705,23 +4851,23 @@
       </p:sp>
       <p:sp>
         <p:nvSpPr>
-          <p:cNvPr id="15" name="번호 3"/>
+          <p:cNvPr id="16" name="번호 3"/>
           <p:cNvSpPr/>
           <p:nvPr/>
         </p:nvSpPr>
         <p:spPr>
           <a:xfrm>
-            <a:off x="8341156" y="3246120"/>
+            <a:off x="8249716" y="3429000"/>
             <a:ext cx="457200" cy="457200"/>
           </a:xfrm>
           <a:prstGeom prst="ellipse">
             <a:avLst/>
           </a:prstGeom>
-          <a:solidFill>
-            <a:srgbClr val="CA7021"/>
-          </a:solidFill>
-          <a:ln>
-            <a:noFill/>
+          <a:noFill/>
+          <a:ln w="19050">
+            <a:solidFill>
+              <a:srgbClr val="D8A579"/>
+            </a:solidFill>
           </a:ln>
         </p:spPr>
         <p:txBody>
@@ -4738,7 +4884,7 @@
             <a:r>
               <a:rPr sz="1600" b="1" i="0">
                 <a:solidFill>
-                  <a:srgbClr val="FFFFFF"/>
+                  <a:srgbClr val="493727"/>
                 </a:solidFill>
               </a:rPr>
               <a:t>3</a:t>
@@ -4748,14 +4894,14 @@
       </p:sp>
       <p:sp>
         <p:nvSpPr>
-          <p:cNvPr id="16" name="TextBox 15"/>
+          <p:cNvPr id="17" name="TextBox 16"/>
           <p:cNvSpPr txBox="1"/>
           <p:nvPr/>
         </p:nvSpPr>
         <p:spPr>
           <a:xfrm>
-            <a:off x="8295436" y="3840480"/>
-            <a:ext cx="3119018" cy="640080"/>
+            <a:off x="8203996" y="4023360"/>
+            <a:ext cx="3210458" cy="640080"/>
           </a:xfrm>
           <a:prstGeom prst="rect">
             <a:avLst/>
@@ -4776,7 +4922,7 @@
             <a:r>
               <a:rPr sz="1800" b="1" i="0">
                 <a:solidFill>
-                  <a:srgbClr val="723F13"/>
+                  <a:srgbClr val="493727"/>
                 </a:solidFill>
               </a:rPr>
               <a:t>이슈</a:t>
@@ -4786,14 +4932,14 @@
       </p:sp>
       <p:sp>
         <p:nvSpPr>
-          <p:cNvPr id="17" name="TextBox 16"/>
+          <p:cNvPr id="18" name="TextBox 17"/>
           <p:cNvSpPr txBox="1"/>
           <p:nvPr/>
         </p:nvSpPr>
         <p:spPr>
           <a:xfrm>
-            <a:off x="8295436" y="4526280"/>
-            <a:ext cx="3119018" cy="1417319"/>
+            <a:off x="8203996" y="4709160"/>
+            <a:ext cx="3210458" cy="1417319"/>
           </a:xfrm>
           <a:prstGeom prst="rect">
             <a:avLst/>
@@ -4814,7 +4960,7 @@
             <a:r>
               <a:rPr sz="1600" b="0" i="0">
                 <a:solidFill>
-                  <a:srgbClr val="2B2B2B"/>
+                  <a:srgbClr val="26231F"/>
                 </a:solidFill>
               </a:rPr>
               <a:t>내용을 입력하세요</a:t>
@@ -4829,7 +4975,7 @@
             <a:r>
               <a:rPr sz="1600" b="0" i="0">
                 <a:solidFill>
-                  <a:srgbClr val="2B2B2B"/>
+                  <a:srgbClr val="26231F"/>
                 </a:solidFill>
               </a:rPr>
               <a:t>내용을 입력하세요</a:t>
@@ -4851,7 +4997,7 @@
     <p:bg>
       <p:bgPr>
         <a:solidFill>
-          <a:srgbClr val="FCF4ED"/>
+          <a:srgbClr val="FBF3EC"/>
         </a:solidFill>
         <a:effectLst/>
       </p:bgPr>
@@ -4871,14 +5017,16 @@
         </p:nvSpPr>
         <p:spPr>
           <a:xfrm>
-            <a:off x="0" y="0"/>
-            <a:ext cx="411480" cy="6858000"/>
-          </a:xfrm>
-          <a:prstGeom prst="rect">
-            <a:avLst/>
+            <a:off x="640080" y="566928"/>
+            <a:ext cx="64008" cy="868680"/>
+          </a:xfrm>
+          <a:prstGeom prst="roundRect">
+            <a:avLst>
+              <a:gd name="adj" fmla="val 50000"/>
+            </a:avLst>
           </a:prstGeom>
           <a:solidFill>
-            <a:srgbClr val="CA7021"/>
+            <a:srgbClr val="D8A579"/>
           </a:solidFill>
           <a:ln>
             <a:noFill/>
@@ -4894,20 +5042,58 @@
       </p:sp>
       <p:sp>
         <p:nvSpPr>
-          <p:cNvPr id="4" name="장식"/>
-          <p:cNvSpPr/>
+          <p:cNvPr id="4" name="상단 라벨"/>
+          <p:cNvSpPr txBox="1"/>
           <p:nvPr/>
         </p:nvSpPr>
         <p:spPr>
           <a:xfrm>
-            <a:off x="411480" y="0"/>
-            <a:ext cx="64008" cy="6858000"/>
+            <a:off x="868680" y="274320"/>
+            <a:ext cx="5486400" cy="274320"/>
           </a:xfrm>
           <a:prstGeom prst="rect">
             <a:avLst/>
           </a:prstGeom>
+          <a:noFill/>
+        </p:spPr>
+        <p:txBody>
+          <a:bodyPr wrap="square" lIns="54864" rIns="54864" tIns="27432" bIns="27432" anchor="ctr">
+            <a:noAutofit/>
+          </a:bodyPr>
+          <a:lstStyle/>
+          <a:p>
+            <a:pPr algn="l">
+              <a:lnSpc>
+                <a:spcPct val="115000"/>
+              </a:lnSpc>
+            </a:pPr>
+            <a:r>
+              <a:rPr sz="900" b="1" i="0" spc="250">
+                <a:solidFill>
+                  <a:srgbClr val="8E8780"/>
+                </a:solidFill>
+              </a:rPr>
+              <a:t>PRESENTATION</a:t>
+            </a:r>
+          </a:p>
+        </p:txBody>
+      </p:sp>
+      <p:sp>
+        <p:nvSpPr>
+          <p:cNvPr id="5" name="포인트"/>
+          <p:cNvSpPr/>
+          <p:nvPr/>
+        </p:nvSpPr>
+        <p:spPr>
+          <a:xfrm>
+            <a:off x="11167567" y="667512"/>
+            <a:ext cx="310896" cy="310896"/>
+          </a:xfrm>
+          <a:prstGeom prst="donut">
+            <a:avLst/>
+          </a:prstGeom>
           <a:solidFill>
-            <a:srgbClr val="3B918E"/>
+            <a:srgbClr val="EBCAAD"/>
           </a:solidFill>
           <a:ln>
             <a:noFill/>
@@ -4933,7 +5119,7 @@
         </p:nvSpPr>
         <p:spPr>
           <a:xfrm>
-            <a:off x="914400" y="457200"/>
+            <a:off x="868680" y="566928"/>
             <a:ext cx="9448495" cy="868680"/>
           </a:xfrm>
         </p:spPr>
@@ -4951,7 +5137,7 @@
             <a:r>
               <a:rPr sz="3000" b="1" i="0">
                 <a:solidFill>
-                  <a:srgbClr val="723F13"/>
+                  <a:srgbClr val="26231F"/>
                 </a:solidFill>
               </a:rPr>
               <a:t>한눈에 비교</a:t>
@@ -4961,27 +5147,25 @@
       </p:sp>
       <p:sp>
         <p:nvSpPr>
-          <p:cNvPr id="5" name="왼쪽 칸"/>
+          <p:cNvPr id="6" name="왼쪽 칸"/>
           <p:cNvSpPr/>
           <p:nvPr/>
         </p:nvSpPr>
         <p:spPr>
           <a:xfrm>
-            <a:off x="914400" y="1600200"/>
-            <a:ext cx="5135727" cy="4800600"/>
+            <a:off x="640080" y="1783080"/>
+            <a:ext cx="5272887" cy="3291840"/>
           </a:xfrm>
           <a:prstGeom prst="roundRect">
             <a:avLst>
-              <a:gd name="adj" fmla="val 8000"/>
+              <a:gd name="adj" fmla="val 7000"/>
             </a:avLst>
           </a:prstGeom>
           <a:solidFill>
-            <a:srgbClr val="FCF4ED"/>
+            <a:srgbClr val="FBF3EC"/>
           </a:solidFill>
-          <a:ln w="12700">
-            <a:solidFill>
-              <a:srgbClr val="F8DFC9"/>
-            </a:solidFill>
+          <a:ln>
+            <a:noFill/>
           </a:ln>
         </p:spPr>
         <p:txBody>
@@ -4994,14 +5178,14 @@
       </p:sp>
       <p:sp>
         <p:nvSpPr>
-          <p:cNvPr id="6" name="칸 제목 바"/>
+          <p:cNvPr id="7" name="칸 제목 바"/>
           <p:cNvSpPr/>
           <p:nvPr/>
         </p:nvSpPr>
         <p:spPr>
           <a:xfrm>
-            <a:off x="914400" y="1600200"/>
-            <a:ext cx="5135727" cy="640080"/>
+            <a:off x="640080" y="1783080"/>
+            <a:ext cx="5272887" cy="640080"/>
           </a:xfrm>
           <a:prstGeom prst="roundRect">
             <a:avLst>
@@ -5009,7 +5193,7 @@
             </a:avLst>
           </a:prstGeom>
           <a:solidFill>
-            <a:srgbClr val="CA7021"/>
+            <a:srgbClr val="D8A579"/>
           </a:solidFill>
           <a:ln>
             <a:noFill/>
@@ -5025,14 +5209,14 @@
       </p:sp>
       <p:sp>
         <p:nvSpPr>
-          <p:cNvPr id="7" name="TextBox 6"/>
+          <p:cNvPr id="8" name="TextBox 7"/>
           <p:cNvSpPr txBox="1"/>
           <p:nvPr/>
         </p:nvSpPr>
         <p:spPr>
           <a:xfrm>
-            <a:off x="1097280" y="1600200"/>
-            <a:ext cx="4769967" cy="640080"/>
+            <a:off x="822959" y="1783080"/>
+            <a:ext cx="4907127" cy="640080"/>
           </a:xfrm>
           <a:prstGeom prst="rect">
             <a:avLst/>
@@ -5053,7 +5237,7 @@
             <a:r>
               <a:rPr sz="1800" b="1" i="0">
                 <a:solidFill>
-                  <a:srgbClr val="FFFFFF"/>
+                  <a:srgbClr val="26231F"/>
                 </a:solidFill>
               </a:rPr>
               <a:t>계획</a:t>
@@ -5063,14 +5247,14 @@
       </p:sp>
       <p:sp>
         <p:nvSpPr>
-          <p:cNvPr id="8" name="TextBox 7"/>
+          <p:cNvPr id="9" name="TextBox 8"/>
           <p:cNvSpPr txBox="1"/>
           <p:nvPr/>
         </p:nvSpPr>
         <p:spPr>
           <a:xfrm>
-            <a:off x="1143000" y="2423160"/>
-            <a:ext cx="4678527" cy="3886200"/>
+            <a:off x="868680" y="2606040"/>
+            <a:ext cx="4815687" cy="2377440"/>
           </a:xfrm>
           <a:prstGeom prst="rect">
             <a:avLst/>
@@ -5096,7 +5280,7 @@
             <a:r>
               <a:rPr sz="1500" b="0" i="0">
                 <a:solidFill>
-                  <a:srgbClr val="2B2B2B"/>
+                  <a:srgbClr val="26231F"/>
                 </a:solidFill>
               </a:rPr>
               <a:t>내용을 입력하세요</a:t>
@@ -5116,7 +5300,7 @@
             <a:r>
               <a:rPr sz="1500" b="0" i="0">
                 <a:solidFill>
-                  <a:srgbClr val="2B2B2B"/>
+                  <a:srgbClr val="26231F"/>
                 </a:solidFill>
               </a:rPr>
               <a:t>내용을 입력하세요</a:t>
@@ -5136,7 +5320,7 @@
             <a:r>
               <a:rPr sz="1500" b="0" i="0">
                 <a:solidFill>
-                  <a:srgbClr val="2B2B2B"/>
+                  <a:srgbClr val="26231F"/>
                 </a:solidFill>
               </a:rPr>
               <a:t>내용을 입력하세요</a:t>
@@ -5146,27 +5330,25 @@
       </p:sp>
       <p:sp>
         <p:nvSpPr>
-          <p:cNvPr id="9" name="오른쪽 칸"/>
+          <p:cNvPr id="10" name="오른쪽 칸"/>
           <p:cNvSpPr/>
           <p:nvPr/>
         </p:nvSpPr>
         <p:spPr>
           <a:xfrm>
-            <a:off x="6415887" y="1600200"/>
-            <a:ext cx="5135727" cy="4800600"/>
+            <a:off x="6278727" y="1783080"/>
+            <a:ext cx="5272887" cy="3291840"/>
           </a:xfrm>
           <a:prstGeom prst="roundRect">
             <a:avLst>
-              <a:gd name="adj" fmla="val 8000"/>
+              <a:gd name="adj" fmla="val 7000"/>
             </a:avLst>
           </a:prstGeom>
           <a:solidFill>
-            <a:srgbClr val="F8DFC9"/>
+            <a:srgbClr val="F6E4D5"/>
           </a:solidFill>
-          <a:ln w="12700">
-            <a:solidFill>
-              <a:srgbClr val="F8DFC9"/>
-            </a:solidFill>
+          <a:ln>
+            <a:noFill/>
           </a:ln>
         </p:spPr>
         <p:txBody>
@@ -5179,14 +5361,14 @@
       </p:sp>
       <p:sp>
         <p:nvSpPr>
-          <p:cNvPr id="10" name="칸 제목 바"/>
+          <p:cNvPr id="11" name="칸 제목 바"/>
           <p:cNvSpPr/>
           <p:nvPr/>
         </p:nvSpPr>
         <p:spPr>
           <a:xfrm>
-            <a:off x="6415887" y="1600200"/>
-            <a:ext cx="5135727" cy="640080"/>
+            <a:off x="6278727" y="1783080"/>
+            <a:ext cx="5272887" cy="640080"/>
           </a:xfrm>
           <a:prstGeom prst="roundRect">
             <a:avLst>
@@ -5194,7 +5376,7 @@
             </a:avLst>
           </a:prstGeom>
           <a:solidFill>
-            <a:srgbClr val="723F13"/>
+            <a:srgbClr val="493727"/>
           </a:solidFill>
           <a:ln>
             <a:noFill/>
@@ -5210,14 +5392,14 @@
       </p:sp>
       <p:sp>
         <p:nvSpPr>
-          <p:cNvPr id="11" name="TextBox 10"/>
+          <p:cNvPr id="12" name="TextBox 11"/>
           <p:cNvSpPr txBox="1"/>
           <p:nvPr/>
         </p:nvSpPr>
         <p:spPr>
           <a:xfrm>
-            <a:off x="6598767" y="1600200"/>
-            <a:ext cx="4769967" cy="640080"/>
+            <a:off x="6461607" y="1783080"/>
+            <a:ext cx="4907127" cy="640080"/>
           </a:xfrm>
           <a:prstGeom prst="rect">
             <a:avLst/>
@@ -5248,14 +5430,14 @@
       </p:sp>
       <p:sp>
         <p:nvSpPr>
-          <p:cNvPr id="12" name="TextBox 11"/>
+          <p:cNvPr id="13" name="TextBox 12"/>
           <p:cNvSpPr txBox="1"/>
           <p:nvPr/>
         </p:nvSpPr>
         <p:spPr>
           <a:xfrm>
-            <a:off x="6644487" y="2423160"/>
-            <a:ext cx="4678527" cy="3886200"/>
+            <a:off x="6507327" y="2606040"/>
+            <a:ext cx="4815687" cy="2377440"/>
           </a:xfrm>
           <a:prstGeom prst="rect">
             <a:avLst/>
@@ -5281,7 +5463,7 @@
             <a:r>
               <a:rPr sz="1500" b="0" i="0">
                 <a:solidFill>
-                  <a:srgbClr val="2B2B2B"/>
+                  <a:srgbClr val="26231F"/>
                 </a:solidFill>
               </a:rPr>
               <a:t>내용을 입력하세요</a:t>
@@ -5301,7 +5483,7 @@
             <a:r>
               <a:rPr sz="1500" b="0" i="0">
                 <a:solidFill>
-                  <a:srgbClr val="2B2B2B"/>
+                  <a:srgbClr val="26231F"/>
                 </a:solidFill>
               </a:rPr>
               <a:t>내용을 입력하세요</a:t>
@@ -5321,7 +5503,7 @@
             <a:r>
               <a:rPr sz="1500" b="0" i="0">
                 <a:solidFill>
-                  <a:srgbClr val="2B2B2B"/>
+                  <a:srgbClr val="26231F"/>
                 </a:solidFill>
               </a:rPr>
               <a:t>내용을 입력하세요</a:t>
@@ -5343,7 +5525,7 @@
     <p:bg>
       <p:bgPr>
         <a:solidFill>
-          <a:srgbClr val="FCF4ED"/>
+          <a:srgbClr val="FBF3EC"/>
         </a:solidFill>
         <a:effectLst/>
       </p:bgPr>
@@ -5363,14 +5545,16 @@
         </p:nvSpPr>
         <p:spPr>
           <a:xfrm>
-            <a:off x="0" y="0"/>
-            <a:ext cx="411480" cy="6858000"/>
-          </a:xfrm>
-          <a:prstGeom prst="rect">
-            <a:avLst/>
+            <a:off x="640080" y="566928"/>
+            <a:ext cx="64008" cy="868680"/>
+          </a:xfrm>
+          <a:prstGeom prst="roundRect">
+            <a:avLst>
+              <a:gd name="adj" fmla="val 50000"/>
+            </a:avLst>
           </a:prstGeom>
           <a:solidFill>
-            <a:srgbClr val="CA7021"/>
+            <a:srgbClr val="D8A579"/>
           </a:solidFill>
           <a:ln>
             <a:noFill/>
@@ -5386,20 +5570,58 @@
       </p:sp>
       <p:sp>
         <p:nvSpPr>
-          <p:cNvPr id="4" name="장식"/>
-          <p:cNvSpPr/>
+          <p:cNvPr id="4" name="상단 라벨"/>
+          <p:cNvSpPr txBox="1"/>
           <p:nvPr/>
         </p:nvSpPr>
         <p:spPr>
           <a:xfrm>
-            <a:off x="411480" y="0"/>
-            <a:ext cx="64008" cy="6858000"/>
+            <a:off x="868680" y="274320"/>
+            <a:ext cx="5486400" cy="274320"/>
           </a:xfrm>
           <a:prstGeom prst="rect">
             <a:avLst/>
           </a:prstGeom>
+          <a:noFill/>
+        </p:spPr>
+        <p:txBody>
+          <a:bodyPr wrap="square" lIns="54864" rIns="54864" tIns="27432" bIns="27432" anchor="ctr">
+            <a:noAutofit/>
+          </a:bodyPr>
+          <a:lstStyle/>
+          <a:p>
+            <a:pPr algn="l">
+              <a:lnSpc>
+                <a:spcPct val="115000"/>
+              </a:lnSpc>
+            </a:pPr>
+            <a:r>
+              <a:rPr sz="900" b="1" i="0" spc="250">
+                <a:solidFill>
+                  <a:srgbClr val="8E8780"/>
+                </a:solidFill>
+              </a:rPr>
+              <a:t>PRESENTATION</a:t>
+            </a:r>
+          </a:p>
+        </p:txBody>
+      </p:sp>
+      <p:sp>
+        <p:nvSpPr>
+          <p:cNvPr id="5" name="포인트"/>
+          <p:cNvSpPr/>
+          <p:nvPr/>
+        </p:nvSpPr>
+        <p:spPr>
+          <a:xfrm>
+            <a:off x="11167567" y="667512"/>
+            <a:ext cx="310896" cy="310896"/>
+          </a:xfrm>
+          <a:prstGeom prst="donut">
+            <a:avLst/>
+          </a:prstGeom>
           <a:solidFill>
-            <a:srgbClr val="3B918E"/>
+            <a:srgbClr val="EBCAAD"/>
           </a:solidFill>
           <a:ln>
             <a:noFill/>
@@ -5425,7 +5647,7 @@
         </p:nvSpPr>
         <p:spPr>
           <a:xfrm>
-            <a:off x="914400" y="457200"/>
+            <a:off x="868680" y="566928"/>
             <a:ext cx="9448495" cy="868680"/>
           </a:xfrm>
         </p:spPr>
@@ -5443,7 +5665,7 @@
             <a:r>
               <a:rPr sz="3000" b="1" i="0">
                 <a:solidFill>
-                  <a:srgbClr val="723F13"/>
+                  <a:srgbClr val="26231F"/>
                 </a:solidFill>
               </a:rPr>
               <a:t>일정·현황</a:t>
@@ -5453,15 +5675,15 @@
       </p:sp>
       <p:graphicFrame>
         <p:nvGraphicFramePr>
-          <p:cNvPr id="5" name="표"/>
+          <p:cNvPr id="6" name="표"/>
           <p:cNvGraphicFramePr>
             <a:graphicFrameLocks noGrp="1"/>
           </p:cNvGraphicFramePr>
           <p:nvPr/>
         </p:nvGraphicFramePr>
         <p:xfrm>
-          <a:off x="914400" y="1600200"/>
-          <a:ext cx="10637212" cy="3840480"/>
+          <a:off x="640080" y="1783080"/>
+          <a:ext cx="10911532" cy="3840480"/>
         </p:xfrm>
         <a:graphic>
           <a:graphicData uri="http://schemas.openxmlformats.org/drawingml/2006/table">
@@ -5470,10 +5692,10 @@
                 <a:tableStyleId>{5C22544A-7EE6-4342-B048-85BDC9FD1C3A}</a:tableStyleId>
               </a:tblPr>
               <a:tblGrid>
-                <a:gridCol w="2659303"/>
-                <a:gridCol w="2659303"/>
-                <a:gridCol w="2659303"/>
-                <a:gridCol w="2659303"/>
+                <a:gridCol w="2727883"/>
+                <a:gridCol w="2727883"/>
+                <a:gridCol w="2727883"/>
+                <a:gridCol w="2727883"/>
               </a:tblGrid>
               <a:tr h="640080">
                 <a:tc>
@@ -5485,7 +5707,7 @@
                       <a:r>
                         <a:rPr sz="1500" b="1">
                           <a:solidFill>
-                            <a:srgbClr val="FFFFFF"/>
+                            <a:srgbClr val="26231F"/>
                           </a:solidFill>
                         </a:rPr>
                         <a:t>항목</a:t>
@@ -5495,30 +5717,30 @@
                   <a:tcPr anchor="ctr" marL="73152" marR="73152">
                     <a:lnL w="9525" cap="flat" cmpd="sng" algn="ctr">
                       <a:solidFill>
-                        <a:srgbClr val="CA7021"/>
+                        <a:srgbClr val="D8A579"/>
                       </a:solidFill>
                       <a:prstDash val="solid"/>
                     </a:lnL>
                     <a:lnR w="9525" cap="flat" cmpd="sng" algn="ctr">
                       <a:solidFill>
-                        <a:srgbClr val="CA7021"/>
+                        <a:srgbClr val="D8A579"/>
                       </a:solidFill>
                       <a:prstDash val="solid"/>
                     </a:lnR>
                     <a:lnT w="9525" cap="flat" cmpd="sng" algn="ctr">
                       <a:solidFill>
-                        <a:srgbClr val="CA7021"/>
+                        <a:srgbClr val="D8A579"/>
                       </a:solidFill>
                       <a:prstDash val="solid"/>
                     </a:lnT>
                     <a:lnB w="9525" cap="flat" cmpd="sng" algn="ctr">
                       <a:solidFill>
-                        <a:srgbClr val="CA7021"/>
+                        <a:srgbClr val="D8A579"/>
                       </a:solidFill>
                       <a:prstDash val="solid"/>
                     </a:lnB>
                     <a:solidFill>
-                      <a:srgbClr val="CA7021"/>
+                      <a:srgbClr val="D8A579"/>
                     </a:solidFill>
                   </a:tcPr>
                 </a:tc>
@@ -5531,7 +5753,7 @@
                       <a:r>
                         <a:rPr sz="1500" b="1">
                           <a:solidFill>
-                            <a:srgbClr val="FFFFFF"/>
+                            <a:srgbClr val="26231F"/>
                           </a:solidFill>
                         </a:rPr>
                         <a:t>목표</a:t>
@@ -5541,30 +5763,30 @@
                   <a:tcPr anchor="ctr" marL="73152" marR="73152">
                     <a:lnL w="9525" cap="flat" cmpd="sng" algn="ctr">
                       <a:solidFill>
-                        <a:srgbClr val="CA7021"/>
+                        <a:srgbClr val="D8A579"/>
                       </a:solidFill>
                       <a:prstDash val="solid"/>
                     </a:lnL>
                     <a:lnR w="9525" cap="flat" cmpd="sng" algn="ctr">
                       <a:solidFill>
-                        <a:srgbClr val="CA7021"/>
+                        <a:srgbClr val="D8A579"/>
                       </a:solidFill>
                       <a:prstDash val="solid"/>
                     </a:lnR>
                     <a:lnT w="9525" cap="flat" cmpd="sng" algn="ctr">
                       <a:solidFill>
-                        <a:srgbClr val="CA7021"/>
+                        <a:srgbClr val="D8A579"/>
                       </a:solidFill>
                       <a:prstDash val="solid"/>
                     </a:lnT>
                     <a:lnB w="9525" cap="flat" cmpd="sng" algn="ctr">
                       <a:solidFill>
-                        <a:srgbClr val="CA7021"/>
+                        <a:srgbClr val="D8A579"/>
                       </a:solidFill>
                       <a:prstDash val="solid"/>
                     </a:lnB>
                     <a:solidFill>
-                      <a:srgbClr val="CA7021"/>
+                      <a:srgbClr val="D8A579"/>
                     </a:solidFill>
                   </a:tcPr>
                 </a:tc>
@@ -5577,7 +5799,7 @@
                       <a:r>
                         <a:rPr sz="1500" b="1">
                           <a:solidFill>
-                            <a:srgbClr val="FFFFFF"/>
+                            <a:srgbClr val="26231F"/>
                           </a:solidFill>
                         </a:rPr>
                         <a:t>실적</a:t>
@@ -5587,30 +5809,30 @@
                   <a:tcPr anchor="ctr" marL="73152" marR="73152">
                     <a:lnL w="9525" cap="flat" cmpd="sng" algn="ctr">
                       <a:solidFill>
-                        <a:srgbClr val="CA7021"/>
+                        <a:srgbClr val="D8A579"/>
                       </a:solidFill>
                       <a:prstDash val="solid"/>
                     </a:lnL>
                     <a:lnR w="9525" cap="flat" cmpd="sng" algn="ctr">
                       <a:solidFill>
-                        <a:srgbClr val="CA7021"/>
+                        <a:srgbClr val="D8A579"/>
                       </a:solidFill>
                       <a:prstDash val="solid"/>
                     </a:lnR>
                     <a:lnT w="9525" cap="flat" cmpd="sng" algn="ctr">
                       <a:solidFill>
-                        <a:srgbClr val="CA7021"/>
+                        <a:srgbClr val="D8A579"/>
                       </a:solidFill>
                       <a:prstDash val="solid"/>
                     </a:lnT>
                     <a:lnB w="9525" cap="flat" cmpd="sng" algn="ctr">
                       <a:solidFill>
-                        <a:srgbClr val="CA7021"/>
+                        <a:srgbClr val="D8A579"/>
                       </a:solidFill>
                       <a:prstDash val="solid"/>
                     </a:lnB>
                     <a:solidFill>
-                      <a:srgbClr val="CA7021"/>
+                      <a:srgbClr val="D8A579"/>
                     </a:solidFill>
                   </a:tcPr>
                 </a:tc>
@@ -5623,7 +5845,7 @@
                       <a:r>
                         <a:rPr sz="1500" b="1">
                           <a:solidFill>
-                            <a:srgbClr val="FFFFFF"/>
+                            <a:srgbClr val="26231F"/>
                           </a:solidFill>
                         </a:rPr>
                         <a:t>달성률</a:t>
@@ -5633,30 +5855,30 @@
                   <a:tcPr anchor="ctr" marL="73152" marR="73152">
                     <a:lnL w="9525" cap="flat" cmpd="sng" algn="ctr">
                       <a:solidFill>
-                        <a:srgbClr val="CA7021"/>
+                        <a:srgbClr val="D8A579"/>
                       </a:solidFill>
                       <a:prstDash val="solid"/>
                     </a:lnL>
                     <a:lnR w="9525" cap="flat" cmpd="sng" algn="ctr">
                       <a:solidFill>
-                        <a:srgbClr val="CA7021"/>
+                        <a:srgbClr val="D8A579"/>
                       </a:solidFill>
                       <a:prstDash val="solid"/>
                     </a:lnR>
                     <a:lnT w="9525" cap="flat" cmpd="sng" algn="ctr">
                       <a:solidFill>
-                        <a:srgbClr val="CA7021"/>
+                        <a:srgbClr val="D8A579"/>
                       </a:solidFill>
                       <a:prstDash val="solid"/>
                     </a:lnT>
                     <a:lnB w="9525" cap="flat" cmpd="sng" algn="ctr">
                       <a:solidFill>
-                        <a:srgbClr val="CA7021"/>
+                        <a:srgbClr val="D8A579"/>
                       </a:solidFill>
                       <a:prstDash val="solid"/>
                     </a:lnB>
                     <a:solidFill>
-                      <a:srgbClr val="CA7021"/>
+                      <a:srgbClr val="D8A579"/>
                     </a:solidFill>
                   </a:tcPr>
                 </a:tc>
@@ -5671,7 +5893,7 @@
                       <a:r>
                         <a:rPr sz="1500" b="1">
                           <a:solidFill>
-                            <a:srgbClr val="723F13"/>
+                            <a:srgbClr val="493727"/>
                           </a:solidFill>
                         </a:rPr>
                         <a:t>1</a:t>
@@ -5681,30 +5903,30 @@
                   <a:tcPr anchor="ctr" marL="73152" marR="73152">
                     <a:lnL w="9525" cap="flat" cmpd="sng" algn="ctr">
                       <a:solidFill>
-                        <a:srgbClr val="F8DFC9"/>
+                        <a:srgbClr val="F6E4D5"/>
                       </a:solidFill>
                       <a:prstDash val="solid"/>
                     </a:lnL>
                     <a:lnR w="9525" cap="flat" cmpd="sng" algn="ctr">
                       <a:solidFill>
-                        <a:srgbClr val="F8DFC9"/>
+                        <a:srgbClr val="F6E4D5"/>
                       </a:solidFill>
                       <a:prstDash val="solid"/>
                     </a:lnR>
                     <a:lnT w="9525" cap="flat" cmpd="sng" algn="ctr">
                       <a:solidFill>
-                        <a:srgbClr val="F8DFC9"/>
+                        <a:srgbClr val="F6E4D5"/>
                       </a:solidFill>
                       <a:prstDash val="solid"/>
                     </a:lnT>
                     <a:lnB w="9525" cap="flat" cmpd="sng" algn="ctr">
                       <a:solidFill>
-                        <a:srgbClr val="F8DFC9"/>
+                        <a:srgbClr val="F6E4D5"/>
                       </a:solidFill>
                       <a:prstDash val="solid"/>
                     </a:lnB>
                     <a:solidFill>
-                      <a:srgbClr val="F8DFC9"/>
+                      <a:srgbClr val="F6E4D5"/>
                     </a:solidFill>
                   </a:tcPr>
                 </a:tc>
@@ -5717,7 +5939,7 @@
                       <a:r>
                         <a:rPr sz="1500" b="0">
                           <a:solidFill>
-                            <a:srgbClr val="2B2B2B"/>
+                            <a:srgbClr val="26231F"/>
                           </a:solidFill>
                         </a:rPr>
                         <a:t>내용 입력</a:t>
@@ -5727,25 +5949,25 @@
                   <a:tcPr anchor="ctr" marL="73152" marR="73152">
                     <a:lnL w="9525" cap="flat" cmpd="sng" algn="ctr">
                       <a:solidFill>
-                        <a:srgbClr val="F8DFC9"/>
+                        <a:srgbClr val="F6E4D5"/>
                       </a:solidFill>
                       <a:prstDash val="solid"/>
                     </a:lnL>
                     <a:lnR w="9525" cap="flat" cmpd="sng" algn="ctr">
                       <a:solidFill>
-                        <a:srgbClr val="F8DFC9"/>
+                        <a:srgbClr val="F6E4D5"/>
                       </a:solidFill>
                       <a:prstDash val="solid"/>
                     </a:lnR>
                     <a:lnT w="9525" cap="flat" cmpd="sng" algn="ctr">
                       <a:solidFill>
-                        <a:srgbClr val="F8DFC9"/>
+                        <a:srgbClr val="F6E4D5"/>
                       </a:solidFill>
                       <a:prstDash val="solid"/>
                     </a:lnT>
                     <a:lnB w="9525" cap="flat" cmpd="sng" algn="ctr">
                       <a:solidFill>
-                        <a:srgbClr val="F8DFC9"/>
+                        <a:srgbClr val="F6E4D5"/>
                       </a:solidFill>
                       <a:prstDash val="solid"/>
                     </a:lnB>
@@ -5763,7 +5985,7 @@
                       <a:r>
                         <a:rPr sz="1500" b="0">
                           <a:solidFill>
-                            <a:srgbClr val="2B2B2B"/>
+                            <a:srgbClr val="26231F"/>
                           </a:solidFill>
                         </a:rPr>
                         <a:t/>
@@ -5773,25 +5995,25 @@
                   <a:tcPr anchor="ctr" marL="73152" marR="73152">
                     <a:lnL w="9525" cap="flat" cmpd="sng" algn="ctr">
                       <a:solidFill>
-                        <a:srgbClr val="F8DFC9"/>
+                        <a:srgbClr val="F6E4D5"/>
                       </a:solidFill>
                       <a:prstDash val="solid"/>
                     </a:lnL>
                     <a:lnR w="9525" cap="flat" cmpd="sng" algn="ctr">
                       <a:solidFill>
-                        <a:srgbClr val="F8DFC9"/>
+                        <a:srgbClr val="F6E4D5"/>
                       </a:solidFill>
                       <a:prstDash val="solid"/>
                     </a:lnR>
                     <a:lnT w="9525" cap="flat" cmpd="sng" algn="ctr">
                       <a:solidFill>
-                        <a:srgbClr val="F8DFC9"/>
+                        <a:srgbClr val="F6E4D5"/>
                       </a:solidFill>
                       <a:prstDash val="solid"/>
                     </a:lnT>
                     <a:lnB w="9525" cap="flat" cmpd="sng" algn="ctr">
                       <a:solidFill>
-                        <a:srgbClr val="F8DFC9"/>
+                        <a:srgbClr val="F6E4D5"/>
                       </a:solidFill>
                       <a:prstDash val="solid"/>
                     </a:lnB>
@@ -5809,7 +6031,7 @@
                       <a:r>
                         <a:rPr sz="1500" b="0">
                           <a:solidFill>
-                            <a:srgbClr val="2B2B2B"/>
+                            <a:srgbClr val="26231F"/>
                           </a:solidFill>
                         </a:rPr>
                         <a:t/>
@@ -5819,25 +6041,25 @@
                   <a:tcPr anchor="ctr" marL="73152" marR="73152">
                     <a:lnL w="9525" cap="flat" cmpd="sng" algn="ctr">
                       <a:solidFill>
-                        <a:srgbClr val="F8DFC9"/>
+                        <a:srgbClr val="F6E4D5"/>
                       </a:solidFill>
                       <a:prstDash val="solid"/>
                     </a:lnL>
                     <a:lnR w="9525" cap="flat" cmpd="sng" algn="ctr">
                       <a:solidFill>
-                        <a:srgbClr val="F8DFC9"/>
+                        <a:srgbClr val="F6E4D5"/>
                       </a:solidFill>
                       <a:prstDash val="solid"/>
                     </a:lnR>
                     <a:lnT w="9525" cap="flat" cmpd="sng" algn="ctr">
                       <a:solidFill>
-                        <a:srgbClr val="F8DFC9"/>
+                        <a:srgbClr val="F6E4D5"/>
                       </a:solidFill>
                       <a:prstDash val="solid"/>
                     </a:lnT>
                     <a:lnB w="9525" cap="flat" cmpd="sng" algn="ctr">
                       <a:solidFill>
-                        <a:srgbClr val="F8DFC9"/>
+                        <a:srgbClr val="F6E4D5"/>
                       </a:solidFill>
                       <a:prstDash val="solid"/>
                     </a:lnB>
@@ -5857,7 +6079,7 @@
                       <a:r>
                         <a:rPr sz="1500" b="1">
                           <a:solidFill>
-                            <a:srgbClr val="723F13"/>
+                            <a:srgbClr val="493727"/>
                           </a:solidFill>
                         </a:rPr>
                         <a:t>2</a:t>
@@ -5867,30 +6089,30 @@
                   <a:tcPr anchor="ctr" marL="73152" marR="73152">
                     <a:lnL w="9525" cap="flat" cmpd="sng" algn="ctr">
                       <a:solidFill>
-                        <a:srgbClr val="F8DFC9"/>
+                        <a:srgbClr val="F6E4D5"/>
                       </a:solidFill>
                       <a:prstDash val="solid"/>
                     </a:lnL>
                     <a:lnR w="9525" cap="flat" cmpd="sng" algn="ctr">
                       <a:solidFill>
-                        <a:srgbClr val="F8DFC9"/>
+                        <a:srgbClr val="F6E4D5"/>
                       </a:solidFill>
                       <a:prstDash val="solid"/>
                     </a:lnR>
                     <a:lnT w="9525" cap="flat" cmpd="sng" algn="ctr">
                       <a:solidFill>
-                        <a:srgbClr val="F8DFC9"/>
+                        <a:srgbClr val="F6E4D5"/>
                       </a:solidFill>
                       <a:prstDash val="solid"/>
                     </a:lnT>
                     <a:lnB w="9525" cap="flat" cmpd="sng" algn="ctr">
                       <a:solidFill>
-                        <a:srgbClr val="F8DFC9"/>
+                        <a:srgbClr val="F6E4D5"/>
                       </a:solidFill>
                       <a:prstDash val="solid"/>
                     </a:lnB>
                     <a:solidFill>
-                      <a:srgbClr val="F8DFC9"/>
+                      <a:srgbClr val="F6E4D5"/>
                     </a:solidFill>
                   </a:tcPr>
                 </a:tc>
@@ -5903,7 +6125,7 @@
                       <a:r>
                         <a:rPr sz="1500" b="0">
                           <a:solidFill>
-                            <a:srgbClr val="2B2B2B"/>
+                            <a:srgbClr val="26231F"/>
                           </a:solidFill>
                         </a:rPr>
                         <a:t>내용 입력</a:t>
@@ -5913,30 +6135,30 @@
                   <a:tcPr anchor="ctr" marL="73152" marR="73152">
                     <a:lnL w="9525" cap="flat" cmpd="sng" algn="ctr">
                       <a:solidFill>
-                        <a:srgbClr val="F8DFC9"/>
+                        <a:srgbClr val="F6E4D5"/>
                       </a:solidFill>
                       <a:prstDash val="solid"/>
                     </a:lnL>
                     <a:lnR w="9525" cap="flat" cmpd="sng" algn="ctr">
                       <a:solidFill>
-                        <a:srgbClr val="F8DFC9"/>
+                        <a:srgbClr val="F6E4D5"/>
                       </a:solidFill>
                       <a:prstDash val="solid"/>
                     </a:lnR>
                     <a:lnT w="9525" cap="flat" cmpd="sng" algn="ctr">
                       <a:solidFill>
-                        <a:srgbClr val="F8DFC9"/>
+                        <a:srgbClr val="F6E4D5"/>
                       </a:solidFill>
                       <a:prstDash val="solid"/>
                     </a:lnT>
                     <a:lnB w="9525" cap="flat" cmpd="sng" algn="ctr">
                       <a:solidFill>
-                        <a:srgbClr val="F8DFC9"/>
+                        <a:srgbClr val="F6E4D5"/>
                       </a:solidFill>
                       <a:prstDash val="solid"/>
                     </a:lnB>
                     <a:solidFill>
-                      <a:srgbClr val="FCF4ED"/>
+                      <a:srgbClr val="FBF3EC"/>
                     </a:solidFill>
                   </a:tcPr>
                 </a:tc>
@@ -5949,7 +6171,7 @@
                       <a:r>
                         <a:rPr sz="1500" b="0">
                           <a:solidFill>
-                            <a:srgbClr val="2B2B2B"/>
+                            <a:srgbClr val="26231F"/>
                           </a:solidFill>
                         </a:rPr>
                         <a:t/>
@@ -5959,30 +6181,30 @@
                   <a:tcPr anchor="ctr" marL="73152" marR="73152">
                     <a:lnL w="9525" cap="flat" cmpd="sng" algn="ctr">
                       <a:solidFill>
-                        <a:srgbClr val="F8DFC9"/>
+                        <a:srgbClr val="F6E4D5"/>
                       </a:solidFill>
                       <a:prstDash val="solid"/>
                     </a:lnL>
                     <a:lnR w="9525" cap="flat" cmpd="sng" algn="ctr">
                       <a:solidFill>
-                        <a:srgbClr val="F8DFC9"/>
+                        <a:srgbClr val="F6E4D5"/>
                       </a:solidFill>
                       <a:prstDash val="solid"/>
                     </a:lnR>
                     <a:lnT w="9525" cap="flat" cmpd="sng" algn="ctr">
                       <a:solidFill>
-                        <a:srgbClr val="F8DFC9"/>
+                        <a:srgbClr val="F6E4D5"/>
                       </a:solidFill>
                       <a:prstDash val="solid"/>
                     </a:lnT>
                     <a:lnB w="9525" cap="flat" cmpd="sng" algn="ctr">
                       <a:solidFill>
-                        <a:srgbClr val="F8DFC9"/>
+                        <a:srgbClr val="F6E4D5"/>
                       </a:solidFill>
                       <a:prstDash val="solid"/>
                     </a:lnB>
                     <a:solidFill>
-                      <a:srgbClr val="FCF4ED"/>
+                      <a:srgbClr val="FBF3EC"/>
                     </a:solidFill>
                   </a:tcPr>
                 </a:tc>
@@ -5995,7 +6217,7 @@
                       <a:r>
                         <a:rPr sz="1500" b="0">
                           <a:solidFill>
-                            <a:srgbClr val="2B2B2B"/>
+                            <a:srgbClr val="26231F"/>
                           </a:solidFill>
                         </a:rPr>
                         <a:t/>
@@ -6005,30 +6227,30 @@
                   <a:tcPr anchor="ctr" marL="73152" marR="73152">
                     <a:lnL w="9525" cap="flat" cmpd="sng" algn="ctr">
                       <a:solidFill>
-                        <a:srgbClr val="F8DFC9"/>
+                        <a:srgbClr val="F6E4D5"/>
                       </a:solidFill>
                       <a:prstDash val="solid"/>
                     </a:lnL>
                     <a:lnR w="9525" cap="flat" cmpd="sng" algn="ctr">
                       <a:solidFill>
-                        <a:srgbClr val="F8DFC9"/>
+                        <a:srgbClr val="F6E4D5"/>
                       </a:solidFill>
                       <a:prstDash val="solid"/>
                     </a:lnR>
                     <a:lnT w="9525" cap="flat" cmpd="sng" algn="ctr">
                       <a:solidFill>
-                        <a:srgbClr val="F8DFC9"/>
+                        <a:srgbClr val="F6E4D5"/>
                       </a:solidFill>
                       <a:prstDash val="solid"/>
                     </a:lnT>
                     <a:lnB w="9525" cap="flat" cmpd="sng" algn="ctr">
                       <a:solidFill>
-                        <a:srgbClr val="F8DFC9"/>
+                        <a:srgbClr val="F6E4D5"/>
                       </a:solidFill>
                       <a:prstDash val="solid"/>
                     </a:lnB>
                     <a:solidFill>
-                      <a:srgbClr val="FCF4ED"/>
+                      <a:srgbClr val="FBF3EC"/>
                     </a:solidFill>
                   </a:tcPr>
                 </a:tc>
@@ -6043,7 +6265,7 @@
                       <a:r>
                         <a:rPr sz="1500" b="1">
                           <a:solidFill>
-                            <a:srgbClr val="723F13"/>
+                            <a:srgbClr val="493727"/>
                           </a:solidFill>
                         </a:rPr>
                         <a:t>3</a:t>
@@ -6053,30 +6275,30 @@
                   <a:tcPr anchor="ctr" marL="73152" marR="73152">
                     <a:lnL w="9525" cap="flat" cmpd="sng" algn="ctr">
                       <a:solidFill>
-                        <a:srgbClr val="F8DFC9"/>
+                        <a:srgbClr val="F6E4D5"/>
                       </a:solidFill>
                       <a:prstDash val="solid"/>
                     </a:lnL>
                     <a:lnR w="9525" cap="flat" cmpd="sng" algn="ctr">
                       <a:solidFill>
-                        <a:srgbClr val="F8DFC9"/>
+                        <a:srgbClr val="F6E4D5"/>
                       </a:solidFill>
                       <a:prstDash val="solid"/>
                     </a:lnR>
                     <a:lnT w="9525" cap="flat" cmpd="sng" algn="ctr">
                       <a:solidFill>
-                        <a:srgbClr val="F8DFC9"/>
+                        <a:srgbClr val="F6E4D5"/>
                       </a:solidFill>
                       <a:prstDash val="solid"/>
                     </a:lnT>
                     <a:lnB w="9525" cap="flat" cmpd="sng" algn="ctr">
                       <a:solidFill>
-                        <a:srgbClr val="F8DFC9"/>
+                        <a:srgbClr val="F6E4D5"/>
                       </a:solidFill>
                       <a:prstDash val="solid"/>
                     </a:lnB>
                     <a:solidFill>
-                      <a:srgbClr val="F8DFC9"/>
+                      <a:srgbClr val="F6E4D5"/>
                     </a:solidFill>
                   </a:tcPr>
                 </a:tc>
@@ -6089,7 +6311,7 @@
                       <a:r>
                         <a:rPr sz="1500" b="0">
                           <a:solidFill>
-                            <a:srgbClr val="2B2B2B"/>
+                            <a:srgbClr val="26231F"/>
                           </a:solidFill>
                         </a:rPr>
                         <a:t>내용 입력</a:t>
@@ -6099,25 +6321,25 @@
                   <a:tcPr anchor="ctr" marL="73152" marR="73152">
                     <a:lnL w="9525" cap="flat" cmpd="sng" algn="ctr">
                       <a:solidFill>
-                        <a:srgbClr val="F8DFC9"/>
+                        <a:srgbClr val="F6E4D5"/>
                       </a:solidFill>
                       <a:prstDash val="solid"/>
                     </a:lnL>
                     <a:lnR w="9525" cap="flat" cmpd="sng" algn="ctr">
                       <a:solidFill>
-                        <a:srgbClr val="F8DFC9"/>
+                        <a:srgbClr val="F6E4D5"/>
                       </a:solidFill>
                       <a:prstDash val="solid"/>
                     </a:lnR>
                     <a:lnT w="9525" cap="flat" cmpd="sng" algn="ctr">
                       <a:solidFill>
-                        <a:srgbClr val="F8DFC9"/>
+                        <a:srgbClr val="F6E4D5"/>
                       </a:solidFill>
                       <a:prstDash val="solid"/>
                     </a:lnT>
                     <a:lnB w="9525" cap="flat" cmpd="sng" algn="ctr">
                       <a:solidFill>
-                        <a:srgbClr val="F8DFC9"/>
+                        <a:srgbClr val="F6E4D5"/>
                       </a:solidFill>
                       <a:prstDash val="solid"/>
                     </a:lnB>
@@ -6135,7 +6357,7 @@
                       <a:r>
                         <a:rPr sz="1500" b="0">
                           <a:solidFill>
-                            <a:srgbClr val="2B2B2B"/>
+                            <a:srgbClr val="26231F"/>
                           </a:solidFill>
                         </a:rPr>
                         <a:t/>
@@ -6145,25 +6367,25 @@
                   <a:tcPr anchor="ctr" marL="73152" marR="73152">
                     <a:lnL w="9525" cap="flat" cmpd="sng" algn="ctr">
                       <a:solidFill>
-                        <a:srgbClr val="F8DFC9"/>
+                        <a:srgbClr val="F6E4D5"/>
                       </a:solidFill>
                       <a:prstDash val="solid"/>
                     </a:lnL>
                     <a:lnR w="9525" cap="flat" cmpd="sng" algn="ctr">
                       <a:solidFill>
-                        <a:srgbClr val="F8DFC9"/>
+                        <a:srgbClr val="F6E4D5"/>
                       </a:solidFill>
                       <a:prstDash val="solid"/>
                     </a:lnR>
                     <a:lnT w="9525" cap="flat" cmpd="sng" algn="ctr">
                       <a:solidFill>
-                        <a:srgbClr val="F8DFC9"/>
+                        <a:srgbClr val="F6E4D5"/>
                       </a:solidFill>
                       <a:prstDash val="solid"/>
                     </a:lnT>
                     <a:lnB w="9525" cap="flat" cmpd="sng" algn="ctr">
                       <a:solidFill>
-                        <a:srgbClr val="F8DFC9"/>
+                        <a:srgbClr val="F6E4D5"/>
                       </a:solidFill>
                       <a:prstDash val="solid"/>
                     </a:lnB>
@@ -6181,7 +6403,7 @@
                       <a:r>
                         <a:rPr sz="1500" b="0">
                           <a:solidFill>
-                            <a:srgbClr val="2B2B2B"/>
+                            <a:srgbClr val="26231F"/>
                           </a:solidFill>
                         </a:rPr>
                         <a:t/>
@@ -6191,25 +6413,25 @@
                   <a:tcPr anchor="ctr" marL="73152" marR="73152">
                     <a:lnL w="9525" cap="flat" cmpd="sng" algn="ctr">
                       <a:solidFill>
-                        <a:srgbClr val="F8DFC9"/>
+                        <a:srgbClr val="F6E4D5"/>
                       </a:solidFill>
                       <a:prstDash val="solid"/>
                     </a:lnL>
                     <a:lnR w="9525" cap="flat" cmpd="sng" algn="ctr">
                       <a:solidFill>
-                        <a:srgbClr val="F8DFC9"/>
+                        <a:srgbClr val="F6E4D5"/>
                       </a:solidFill>
                       <a:prstDash val="solid"/>
                     </a:lnR>
                     <a:lnT w="9525" cap="flat" cmpd="sng" algn="ctr">
                       <a:solidFill>
-                        <a:srgbClr val="F8DFC9"/>
+                        <a:srgbClr val="F6E4D5"/>
                       </a:solidFill>
                       <a:prstDash val="solid"/>
                     </a:lnT>
                     <a:lnB w="9525" cap="flat" cmpd="sng" algn="ctr">
                       <a:solidFill>
-                        <a:srgbClr val="F8DFC9"/>
+                        <a:srgbClr val="F6E4D5"/>
                       </a:solidFill>
                       <a:prstDash val="solid"/>
                     </a:lnB>
@@ -6229,7 +6451,7 @@
                       <a:r>
                         <a:rPr sz="1500" b="1">
                           <a:solidFill>
-                            <a:srgbClr val="723F13"/>
+                            <a:srgbClr val="493727"/>
                           </a:solidFill>
                         </a:rPr>
                         <a:t>4</a:t>
@@ -6239,30 +6461,30 @@
                   <a:tcPr anchor="ctr" marL="73152" marR="73152">
                     <a:lnL w="9525" cap="flat" cmpd="sng" algn="ctr">
                       <a:solidFill>
-                        <a:srgbClr val="F8DFC9"/>
+                        <a:srgbClr val="F6E4D5"/>
                       </a:solidFill>
                       <a:prstDash val="solid"/>
                     </a:lnL>
                     <a:lnR w="9525" cap="flat" cmpd="sng" algn="ctr">
                       <a:solidFill>
-                        <a:srgbClr val="F8DFC9"/>
+                        <a:srgbClr val="F6E4D5"/>
                       </a:solidFill>
                       <a:prstDash val="solid"/>
                     </a:lnR>
                     <a:lnT w="9525" cap="flat" cmpd="sng" algn="ctr">
                       <a:solidFill>
-                        <a:srgbClr val="F8DFC9"/>
+                        <a:srgbClr val="F6E4D5"/>
                       </a:solidFill>
                       <a:prstDash val="solid"/>
                     </a:lnT>
                     <a:lnB w="9525" cap="flat" cmpd="sng" algn="ctr">
                       <a:solidFill>
-                        <a:srgbClr val="F8DFC9"/>
+                        <a:srgbClr val="F6E4D5"/>
                       </a:solidFill>
                       <a:prstDash val="solid"/>
                     </a:lnB>
                     <a:solidFill>
-                      <a:srgbClr val="F8DFC9"/>
+                      <a:srgbClr val="F6E4D5"/>
                     </a:solidFill>
                   </a:tcPr>
                 </a:tc>
@@ -6275,7 +6497,7 @@
                       <a:r>
                         <a:rPr sz="1500" b="0">
                           <a:solidFill>
-                            <a:srgbClr val="2B2B2B"/>
+                            <a:srgbClr val="26231F"/>
                           </a:solidFill>
                         </a:rPr>
                         <a:t>내용 입력</a:t>
@@ -6285,30 +6507,30 @@
                   <a:tcPr anchor="ctr" marL="73152" marR="73152">
                     <a:lnL w="9525" cap="flat" cmpd="sng" algn="ctr">
                       <a:solidFill>
-                        <a:srgbClr val="F8DFC9"/>
+                        <a:srgbClr val="F6E4D5"/>
                       </a:solidFill>
                       <a:prstDash val="solid"/>
                     </a:lnL>
                     <a:lnR w="9525" cap="flat" cmpd="sng" algn="ctr">
                       <a:solidFill>
-                        <a:srgbClr val="F8DFC9"/>
+                        <a:srgbClr val="F6E4D5"/>
                       </a:solidFill>
                       <a:prstDash val="solid"/>
                     </a:lnR>
                     <a:lnT w="9525" cap="flat" cmpd="sng" algn="ctr">
                       <a:solidFill>
-                        <a:srgbClr val="F8DFC9"/>
+                        <a:srgbClr val="F6E4D5"/>
                       </a:solidFill>
                       <a:prstDash val="solid"/>
                     </a:lnT>
                     <a:lnB w="9525" cap="flat" cmpd="sng" algn="ctr">
                       <a:solidFill>
-                        <a:srgbClr val="F8DFC9"/>
+                        <a:srgbClr val="F6E4D5"/>
                       </a:solidFill>
                       <a:prstDash val="solid"/>
                     </a:lnB>
                     <a:solidFill>
-                      <a:srgbClr val="FCF4ED"/>
+                      <a:srgbClr val="FBF3EC"/>
                     </a:solidFill>
                   </a:tcPr>
                 </a:tc>
@@ -6321,7 +6543,7 @@
                       <a:r>
                         <a:rPr sz="1500" b="0">
                           <a:solidFill>
-                            <a:srgbClr val="2B2B2B"/>
+                            <a:srgbClr val="26231F"/>
                           </a:solidFill>
                         </a:rPr>
                         <a:t/>
@@ -6331,30 +6553,30 @@
                   <a:tcPr anchor="ctr" marL="73152" marR="73152">
                     <a:lnL w="9525" cap="flat" cmpd="sng" algn="ctr">
                       <a:solidFill>
-                        <a:srgbClr val="F8DFC9"/>
+                        <a:srgbClr val="F6E4D5"/>
                       </a:solidFill>
                       <a:prstDash val="solid"/>
                     </a:lnL>
                     <a:lnR w="9525" cap="flat" cmpd="sng" algn="ctr">
                       <a:solidFill>
-                        <a:srgbClr val="F8DFC9"/>
+                        <a:srgbClr val="F6E4D5"/>
                       </a:solidFill>
                       <a:prstDash val="solid"/>
                     </a:lnR>
                     <a:lnT w="9525" cap="flat" cmpd="sng" algn="ctr">
                       <a:solidFill>
-                        <a:srgbClr val="F8DFC9"/>
+                        <a:srgbClr val="F6E4D5"/>
                       </a:solidFill>
                       <a:prstDash val="solid"/>
                     </a:lnT>
                     <a:lnB w="9525" cap="flat" cmpd="sng" algn="ctr">
                       <a:solidFill>
-                        <a:srgbClr val="F8DFC9"/>
+                        <a:srgbClr val="F6E4D5"/>
                       </a:solidFill>
                       <a:prstDash val="solid"/>
                     </a:lnB>
                     <a:solidFill>
-                      <a:srgbClr val="FCF4ED"/>
+                      <a:srgbClr val="FBF3EC"/>
                     </a:solidFill>
                   </a:tcPr>
                 </a:tc>
@@ -6367,7 +6589,7 @@
                       <a:r>
                         <a:rPr sz="1500" b="0">
                           <a:solidFill>
-                            <a:srgbClr val="2B2B2B"/>
+                            <a:srgbClr val="26231F"/>
                           </a:solidFill>
                         </a:rPr>
                         <a:t/>
@@ -6377,30 +6599,30 @@
                   <a:tcPr anchor="ctr" marL="73152" marR="73152">
                     <a:lnL w="9525" cap="flat" cmpd="sng" algn="ctr">
                       <a:solidFill>
-                        <a:srgbClr val="F8DFC9"/>
+                        <a:srgbClr val="F6E4D5"/>
                       </a:solidFill>
                       <a:prstDash val="solid"/>
                     </a:lnL>
                     <a:lnR w="9525" cap="flat" cmpd="sng" algn="ctr">
                       <a:solidFill>
-                        <a:srgbClr val="F8DFC9"/>
+                        <a:srgbClr val="F6E4D5"/>
                       </a:solidFill>
                       <a:prstDash val="solid"/>
                     </a:lnR>
                     <a:lnT w="9525" cap="flat" cmpd="sng" algn="ctr">
                       <a:solidFill>
-                        <a:srgbClr val="F8DFC9"/>
+                        <a:srgbClr val="F6E4D5"/>
                       </a:solidFill>
                       <a:prstDash val="solid"/>
                     </a:lnT>
                     <a:lnB w="9525" cap="flat" cmpd="sng" algn="ctr">
                       <a:solidFill>
-                        <a:srgbClr val="F8DFC9"/>
+                        <a:srgbClr val="F6E4D5"/>
                       </a:solidFill>
                       <a:prstDash val="solid"/>
                     </a:lnB>
                     <a:solidFill>
-                      <a:srgbClr val="FCF4ED"/>
+                      <a:srgbClr val="FBF3EC"/>
                     </a:solidFill>
                   </a:tcPr>
                 </a:tc>
@@ -6415,7 +6637,7 @@
                       <a:r>
                         <a:rPr sz="1500" b="1">
                           <a:solidFill>
-                            <a:srgbClr val="723F13"/>
+                            <a:srgbClr val="493727"/>
                           </a:solidFill>
                         </a:rPr>
                         <a:t>5</a:t>
@@ -6425,30 +6647,30 @@
                   <a:tcPr anchor="ctr" marL="73152" marR="73152">
                     <a:lnL w="9525" cap="flat" cmpd="sng" algn="ctr">
                       <a:solidFill>
-                        <a:srgbClr val="F8DFC9"/>
+                        <a:srgbClr val="F6E4D5"/>
                       </a:solidFill>
                       <a:prstDash val="solid"/>
                     </a:lnL>
                     <a:lnR w="9525" cap="flat" cmpd="sng" algn="ctr">
                       <a:solidFill>
-                        <a:srgbClr val="F8DFC9"/>
+                        <a:srgbClr val="F6E4D5"/>
                       </a:solidFill>
                       <a:prstDash val="solid"/>
                     </a:lnR>
                     <a:lnT w="9525" cap="flat" cmpd="sng" algn="ctr">
                       <a:solidFill>
-                        <a:srgbClr val="F8DFC9"/>
+                        <a:srgbClr val="F6E4D5"/>
                       </a:solidFill>
                       <a:prstDash val="solid"/>
                     </a:lnT>
                     <a:lnB w="9525" cap="flat" cmpd="sng" algn="ctr">
                       <a:solidFill>
-                        <a:srgbClr val="F8DFC9"/>
+                        <a:srgbClr val="F6E4D5"/>
                       </a:solidFill>
                       <a:prstDash val="solid"/>
                     </a:lnB>
                     <a:solidFill>
-                      <a:srgbClr val="F8DFC9"/>
+                      <a:srgbClr val="F6E4D5"/>
                     </a:solidFill>
                   </a:tcPr>
                 </a:tc>
@@ -6461,7 +6683,7 @@
                       <a:r>
                         <a:rPr sz="1500" b="0">
                           <a:solidFill>
-                            <a:srgbClr val="2B2B2B"/>
+                            <a:srgbClr val="26231F"/>
                           </a:solidFill>
                         </a:rPr>
                         <a:t>내용 입력</a:t>
@@ -6471,25 +6693,25 @@
                   <a:tcPr anchor="ctr" marL="73152" marR="73152">
                     <a:lnL w="9525" cap="flat" cmpd="sng" algn="ctr">
                       <a:solidFill>
-                        <a:srgbClr val="F8DFC9"/>
+                        <a:srgbClr val="F6E4D5"/>
                       </a:solidFill>
                       <a:prstDash val="solid"/>
                     </a:lnL>
                     <a:lnR w="9525" cap="flat" cmpd="sng" algn="ctr">
                       <a:solidFill>
-                        <a:srgbClr val="F8DFC9"/>
+                        <a:srgbClr val="F6E4D5"/>
                       </a:solidFill>
                       <a:prstDash val="solid"/>
                     </a:lnR>
                     <a:lnT w="9525" cap="flat" cmpd="sng" algn="ctr">
                       <a:solidFill>
-                        <a:srgbClr val="F8DFC9"/>
+                        <a:srgbClr val="F6E4D5"/>
                       </a:solidFill>
                       <a:prstDash val="solid"/>
                     </a:lnT>
                     <a:lnB w="9525" cap="flat" cmpd="sng" algn="ctr">
                       <a:solidFill>
-                        <a:srgbClr val="F8DFC9"/>
+                        <a:srgbClr val="F6E4D5"/>
                       </a:solidFill>
                       <a:prstDash val="solid"/>
                     </a:lnB>
@@ -6507,7 +6729,7 @@
                       <a:r>
                         <a:rPr sz="1500" b="0">
                           <a:solidFill>
-                            <a:srgbClr val="2B2B2B"/>
+                            <a:srgbClr val="26231F"/>
                           </a:solidFill>
                         </a:rPr>
                         <a:t/>
@@ -6517,25 +6739,25 @@
                   <a:tcPr anchor="ctr" marL="73152" marR="73152">
                     <a:lnL w="9525" cap="flat" cmpd="sng" algn="ctr">
                       <a:solidFill>
-                        <a:srgbClr val="F8DFC9"/>
+                        <a:srgbClr val="F6E4D5"/>
                       </a:solidFill>
                       <a:prstDash val="solid"/>
                     </a:lnL>
                     <a:lnR w="9525" cap="flat" cmpd="sng" algn="ctr">
                       <a:solidFill>
-                        <a:srgbClr val="F8DFC9"/>
+                        <a:srgbClr val="F6E4D5"/>
                       </a:solidFill>
                       <a:prstDash val="solid"/>
                     </a:lnR>
                     <a:lnT w="9525" cap="flat" cmpd="sng" algn="ctr">
                       <a:solidFill>
-                        <a:srgbClr val="F8DFC9"/>
+                        <a:srgbClr val="F6E4D5"/>
                       </a:solidFill>
                       <a:prstDash val="solid"/>
                     </a:lnT>
                     <a:lnB w="9525" cap="flat" cmpd="sng" algn="ctr">
                       <a:solidFill>
-                        <a:srgbClr val="F8DFC9"/>
+                        <a:srgbClr val="F6E4D5"/>
                       </a:solidFill>
                       <a:prstDash val="solid"/>
                     </a:lnB>
@@ -6553,7 +6775,7 @@
                       <a:r>
                         <a:rPr sz="1500" b="0">
                           <a:solidFill>
-                            <a:srgbClr val="2B2B2B"/>
+                            <a:srgbClr val="26231F"/>
                           </a:solidFill>
                         </a:rPr>
                         <a:t/>
@@ -6563,25 +6785,25 @@
                   <a:tcPr anchor="ctr" marL="73152" marR="73152">
                     <a:lnL w="9525" cap="flat" cmpd="sng" algn="ctr">
                       <a:solidFill>
-                        <a:srgbClr val="F8DFC9"/>
+                        <a:srgbClr val="F6E4D5"/>
                       </a:solidFill>
                       <a:prstDash val="solid"/>
                     </a:lnL>
                     <a:lnR w="9525" cap="flat" cmpd="sng" algn="ctr">
                       <a:solidFill>
-                        <a:srgbClr val="F8DFC9"/>
+                        <a:srgbClr val="F6E4D5"/>
                       </a:solidFill>
                       <a:prstDash val="solid"/>
                     </a:lnR>
                     <a:lnT w="9525" cap="flat" cmpd="sng" algn="ctr">
                       <a:solidFill>
-                        <a:srgbClr val="F8DFC9"/>
+                        <a:srgbClr val="F6E4D5"/>
                       </a:solidFill>
                       <a:prstDash val="solid"/>
                     </a:lnT>
                     <a:lnB w="9525" cap="flat" cmpd="sng" algn="ctr">
                       <a:solidFill>
-                        <a:srgbClr val="F8DFC9"/>
+                        <a:srgbClr val="F6E4D5"/>
                       </a:solidFill>
                       <a:prstDash val="solid"/>
                     </a:lnB>
@@ -6606,6 +6828,14 @@
 <file path=ppt/slides/slide6.xml><?xml version="1.0" encoding="utf-8"?>
 <p:sld xmlns:a="http://schemas.openxmlformats.org/drawingml/2006/main" xmlns:p="http://schemas.openxmlformats.org/presentationml/2006/main" xmlns:r="http://schemas.openxmlformats.org/officeDocument/2006/relationships">
   <p:cSld>
+    <p:bg>
+      <p:bgPr>
+        <a:solidFill>
+          <a:srgbClr val="493727"/>
+        </a:solidFill>
+        <a:effectLst/>
+      </p:bgPr>
+    </p:bg>
     <p:spTree>
       <p:nvGrpSpPr>
         <p:cNvPr id="1" name=""/>
@@ -6613,30 +6843,102 @@
         <p:nvPr/>
       </p:nvGrpSpPr>
       <p:grpSpPr/>
-      <p:pic>
-        <p:nvPicPr>
-          <p:cNvPr id="3" name="표지 그림" descr="talk-28.jpg"/>
-          <p:cNvPicPr>
-            <a:picLocks noChangeAspect="1"/>
-          </p:cNvPicPr>
+      <p:sp>
+        <p:nvSpPr>
+          <p:cNvPr id="3" name="장식"/>
+          <p:cNvSpPr/>
           <p:nvPr/>
-        </p:nvPicPr>
-        <p:blipFill>
-          <a:blip r:embed="rId2"/>
-          <a:stretch>
-            <a:fillRect/>
-          </a:stretch>
-        </p:blipFill>
-        <p:spPr>
-          <a:xfrm>
-            <a:off x="0" y="0"/>
-            <a:ext cx="12191695" cy="6858000"/>
+        </p:nvSpPr>
+        <p:spPr>
+          <a:xfrm>
+            <a:off x="6339681" y="137159"/>
+            <a:ext cx="6583680" cy="6583680"/>
+          </a:xfrm>
+          <a:prstGeom prst="ellipse">
+            <a:avLst/>
+          </a:prstGeom>
+          <a:solidFill>
+            <a:srgbClr val="A67E5C"/>
+          </a:solidFill>
+          <a:ln>
+            <a:noFill/>
+          </a:ln>
+        </p:spPr>
+        <p:txBody>
+          <a:bodyPr rtlCol="0" anchor="ctr"/>
+          <a:lstStyle/>
+          <a:p>
+            <a:pPr algn="ctr"/>
+          </a:p>
+        </p:txBody>
+      </p:sp>
+      <p:sp>
+        <p:nvSpPr>
+          <p:cNvPr id="4" name="장식"/>
+          <p:cNvSpPr/>
+          <p:nvPr/>
+        </p:nvSpPr>
+        <p:spPr>
+          <a:xfrm>
+            <a:off x="7315017" y="1325880"/>
+            <a:ext cx="4206240" cy="4206240"/>
+          </a:xfrm>
+          <a:prstGeom prst="ellipse">
+            <a:avLst/>
+          </a:prstGeom>
+          <a:solidFill>
+            <a:srgbClr val="D8A579"/>
+          </a:solidFill>
+          <a:ln>
+            <a:noFill/>
+          </a:ln>
+        </p:spPr>
+        <p:txBody>
+          <a:bodyPr rtlCol="0" anchor="ctr"/>
+          <a:lstStyle/>
+          <a:p>
+            <a:pPr algn="ctr"/>
+          </a:p>
+        </p:txBody>
+      </p:sp>
+      <p:sp>
+        <p:nvSpPr>
+          <p:cNvPr id="5" name="라벨"/>
+          <p:cNvSpPr txBox="1"/>
+          <p:nvPr/>
+        </p:nvSpPr>
+        <p:spPr>
+          <a:xfrm>
+            <a:off x="822960" y="2148840"/>
+            <a:ext cx="5608179" cy="274320"/>
           </a:xfrm>
           <a:prstGeom prst="rect">
             <a:avLst/>
           </a:prstGeom>
-        </p:spPr>
-      </p:pic>
+          <a:noFill/>
+        </p:spPr>
+        <p:txBody>
+          <a:bodyPr wrap="square" lIns="54864" rIns="54864" tIns="27432" bIns="27432" anchor="t">
+            <a:noAutofit/>
+          </a:bodyPr>
+          <a:lstStyle/>
+          <a:p>
+            <a:pPr algn="l">
+              <a:lnSpc>
+                <a:spcPct val="115000"/>
+              </a:lnSpc>
+            </a:pPr>
+            <a:r>
+              <a:rPr sz="1000" b="1" i="0" spc="250">
+                <a:solidFill>
+                  <a:srgbClr val="FFFFFF"/>
+                </a:solidFill>
+              </a:rPr>
+              <a:t>PRESENTATION</a:t>
+            </a:r>
+          </a:p>
+        </p:txBody>
+      </p:sp>
       <p:sp>
         <p:nvSpPr>
           <p:cNvPr id="2" name="Title 1"/>
@@ -6649,8 +6951,8 @@
         </p:nvSpPr>
         <p:spPr>
           <a:xfrm>
-            <a:off x="853418" y="2057400"/>
-            <a:ext cx="6095847" cy="1554480"/>
+            <a:off x="822960" y="2606040"/>
+            <a:ext cx="5608179" cy="1188720"/>
           </a:xfrm>
         </p:spPr>
         <p:txBody>
@@ -6665,9 +6967,9 @@
               </a:lnSpc>
             </a:pPr>
             <a:r>
-              <a:rPr sz="3600" b="1" i="0">
+              <a:rPr sz="4000" b="1" i="0">
                 <a:solidFill>
-                  <a:srgbClr val="723F13"/>
+                  <a:srgbClr val="FFFFFF"/>
                 </a:solidFill>
               </a:rPr>
               <a:t>감사합니다</a:t>
@@ -6677,14 +6979,14 @@
       </p:sp>
       <p:sp>
         <p:nvSpPr>
-          <p:cNvPr id="4" name="한 줄 문구"/>
+          <p:cNvPr id="6" name="한 줄 문구"/>
           <p:cNvSpPr txBox="1"/>
           <p:nvPr/>
         </p:nvSpPr>
         <p:spPr>
           <a:xfrm>
-            <a:off x="853418" y="3749039"/>
-            <a:ext cx="6095847" cy="822960"/>
+            <a:off x="822960" y="3886200"/>
+            <a:ext cx="5608179" cy="822960"/>
           </a:xfrm>
           <a:prstGeom prst="rect">
             <a:avLst/>
@@ -6703,9 +7005,9 @@
               </a:lnSpc>
             </a:pPr>
             <a:r>
-              <a:rPr sz="1700" b="0" i="1">
+              <a:rPr sz="1700" b="0" i="0">
                 <a:solidFill>
-                  <a:srgbClr val="723F13"/>
+                  <a:srgbClr val="FFFFFF"/>
                 </a:solidFill>
               </a:rPr>
               <a:t>끝까지 들어 주셔서 고맙습니다</a:t>
@@ -6715,14 +7017,14 @@
       </p:sp>
       <p:sp>
         <p:nvSpPr>
-          <p:cNvPr id="5" name="안내 문구"/>
+          <p:cNvPr id="7" name="안내 문구"/>
           <p:cNvSpPr txBox="1"/>
           <p:nvPr/>
         </p:nvSpPr>
         <p:spPr>
           <a:xfrm>
-            <a:off x="853418" y="4617720"/>
-            <a:ext cx="6095847" cy="914400"/>
+            <a:off x="822960" y="4754880"/>
+            <a:ext cx="5608179" cy="914400"/>
           </a:xfrm>
           <a:prstGeom prst="rect">
             <a:avLst/>
@@ -6743,7 +7045,7 @@
             <a:r>
               <a:rPr sz="1400" b="0" i="0">
                 <a:solidFill>
-                  <a:srgbClr val="666666"/>
+                  <a:srgbClr val="FFFFFF"/>
                 </a:solidFill>
               </a:rPr>
               <a:t>문의 · 연락처를 입력하세요</a:t>
@@ -6770,34 +7072,34 @@
         <a:sysClr val="window" lastClr="FFFFFF"/>
       </a:lt1>
       <a:dk2>
-        <a:srgbClr val="723F13"/>
+        <a:srgbClr val="493727"/>
       </a:dk2>
       <a:lt2>
-        <a:srgbClr val="FCF4ED"/>
+        <a:srgbClr val="FBF3EC"/>
       </a:lt2>
       <a:accent1>
-        <a:srgbClr val="CA7021"/>
+        <a:srgbClr val="D8A579"/>
       </a:accent1>
       <a:accent2>
-        <a:srgbClr val="3B918E"/>
+        <a:srgbClr val="E1DC98"/>
       </a:accent2>
       <a:accent3>
-        <a:srgbClr val="723F13"/>
+        <a:srgbClr val="493727"/>
       </a:accent3>
       <a:accent4>
-        <a:srgbClr val="F8DFC9"/>
+        <a:srgbClr val="F6E4D5"/>
       </a:accent4>
       <a:accent5>
-        <a:srgbClr val="828058"/>
+        <a:srgbClr val="DCC088"/>
       </a:accent5>
       <a:accent6>
-        <a:srgbClr val="AA8C71"/>
+        <a:srgbClr val="92877D"/>
       </a:accent6>
       <a:hlink>
-        <a:srgbClr val="CA7021"/>
+        <a:srgbClr val="D8A579"/>
       </a:hlink>
       <a:folHlink>
-        <a:srgbClr val="723F13"/>
+        <a:srgbClr val="493727"/>
       </a:folHlink>
     </a:clrScheme>
     <a:fontScheme name="Office">
